--- a/quick-commerce-delivery-dynamic.pptx
+++ b/quick-commerce-delivery-dynamic.pptx
@@ -5,16 +5,16 @@
     <p:sldMasterId id="2147483648" r:id="rId1"/>
   </p:sldMasterIdLst>
   <p:sldIdLst>
-    <p:sldId id="256" r:id="rId7"/>
-    <p:sldId id="257" r:id="rId8"/>
-    <p:sldId id="258" r:id="rId9"/>
-    <p:sldId id="259" r:id="rId10"/>
-    <p:sldId id="260" r:id="rId11"/>
-    <p:sldId id="261" r:id="rId12"/>
-    <p:sldId id="262" r:id="rId13"/>
-    <p:sldId id="263" r:id="rId14"/>
+    <p:sldId id="256" r:id="rId2"/>
+    <p:sldId id="257" r:id="rId3"/>
+    <p:sldId id="258" r:id="rId4"/>
+    <p:sldId id="259" r:id="rId5"/>
+    <p:sldId id="260" r:id="rId6"/>
+    <p:sldId id="261" r:id="rId7"/>
+    <p:sldId id="262" r:id="rId8"/>
+    <p:sldId id="263" r:id="rId9"/>
   </p:sldIdLst>
-  <p:sldSz cx="10689336" cy="7562088" type="screen4x3"/>
+  <p:sldSz cx="10688638" cy="7562850"/>
   <p:notesSz cx="6858000" cy="9144000"/>
   <p:defaultTextStyle>
     <a:defPPr>
@@ -111,6 +111,22 @@
       </a:defRPr>
     </a:lvl9pPr>
   </p:defaultTextStyle>
+  <p:extLst>
+    <p:ext uri="{EFAFB233-063F-42B5-8137-9DF3F51BA10A}">
+      <p15:sldGuideLst xmlns:p15="http://schemas.microsoft.com/office/powerpoint/2012/main">
+        <p15:guide id="1" orient="horz" pos="2160">
+          <p15:clr>
+            <a:srgbClr val="A4A3A4"/>
+          </p15:clr>
+        </p15:guide>
+        <p15:guide id="2" pos="2880">
+          <p15:clr>
+            <a:srgbClr val="A4A3A4"/>
+          </p15:clr>
+        </p15:guide>
+      </p15:sldGuideLst>
+    </p:ext>
+  </p:extLst>
 </p:presentation>
 </file>
 
@@ -152,10 +168,9 @@
           <a:lstStyle/>
           <a:p>
             <a:r>
-              <a:rPr lang="en-US" smtClean="0"/>
+              <a:rPr lang="en-US"/>
               <a:t>Click to edit Master title style</a:t>
             </a:r>
-            <a:endParaRPr lang="en-US"/>
           </a:p>
         </p:txBody>
       </p:sp>
@@ -271,10 +286,9 @@
           </a:lstStyle>
           <a:p>
             <a:r>
-              <a:rPr lang="en-US" smtClean="0"/>
+              <a:rPr lang="en-US"/>
               <a:t>Click to edit Master subtitle style</a:t>
             </a:r>
-            <a:endParaRPr lang="en-US"/>
           </a:p>
         </p:txBody>
       </p:sp>
@@ -295,7 +309,7 @@
           <a:p>
             <a:fld id="{5BCAD085-E8A6-8845-BD4E-CB4CCA059FC4}" type="datetimeFigureOut">
               <a:rPr lang="en-US" smtClean="0"/>
-              <a:t>1/27/13</a:t>
+              <a:t>5/11/26</a:t>
             </a:fld>
             <a:endParaRPr lang="en-US"/>
           </a:p>
@@ -389,10 +403,9 @@
           <a:lstStyle/>
           <a:p>
             <a:r>
-              <a:rPr lang="en-US" smtClean="0"/>
+              <a:rPr lang="en-US"/>
               <a:t>Click to edit Master title style</a:t>
             </a:r>
-            <a:endParaRPr lang="en-US"/>
           </a:p>
         </p:txBody>
       </p:sp>
@@ -413,38 +426,37 @@
           <a:p>
             <a:pPr lvl="0"/>
             <a:r>
-              <a:rPr lang="en-US" smtClean="0"/>
+              <a:rPr lang="en-US"/>
               <a:t>Click to edit Master text styles</a:t>
             </a:r>
           </a:p>
           <a:p>
             <a:pPr lvl="1"/>
             <a:r>
-              <a:rPr lang="en-US" smtClean="0"/>
+              <a:rPr lang="en-US"/>
               <a:t>Second level</a:t>
             </a:r>
           </a:p>
           <a:p>
             <a:pPr lvl="2"/>
             <a:r>
-              <a:rPr lang="en-US" smtClean="0"/>
+              <a:rPr lang="en-US"/>
               <a:t>Third level</a:t>
             </a:r>
           </a:p>
           <a:p>
             <a:pPr lvl="3"/>
             <a:r>
-              <a:rPr lang="en-US" smtClean="0"/>
+              <a:rPr lang="en-US"/>
               <a:t>Fourth level</a:t>
             </a:r>
           </a:p>
           <a:p>
             <a:pPr lvl="4"/>
             <a:r>
-              <a:rPr lang="en-US" smtClean="0"/>
+              <a:rPr lang="en-US"/>
               <a:t>Fifth level</a:t>
             </a:r>
-            <a:endParaRPr lang="en-US"/>
           </a:p>
         </p:txBody>
       </p:sp>
@@ -465,7 +477,7 @@
           <a:p>
             <a:fld id="{5BCAD085-E8A6-8845-BD4E-CB4CCA059FC4}" type="datetimeFigureOut">
               <a:rPr lang="en-US" smtClean="0"/>
-              <a:t>1/27/13</a:t>
+              <a:t>5/11/26</a:t>
             </a:fld>
             <a:endParaRPr lang="en-US"/>
           </a:p>
@@ -564,10 +576,9 @@
           <a:lstStyle/>
           <a:p>
             <a:r>
-              <a:rPr lang="en-US" smtClean="0"/>
+              <a:rPr lang="en-US"/>
               <a:t>Click to edit Master title style</a:t>
             </a:r>
-            <a:endParaRPr lang="en-US"/>
           </a:p>
         </p:txBody>
       </p:sp>
@@ -593,38 +604,37 @@
           <a:p>
             <a:pPr lvl="0"/>
             <a:r>
-              <a:rPr lang="en-US" smtClean="0"/>
+              <a:rPr lang="en-US"/>
               <a:t>Click to edit Master text styles</a:t>
             </a:r>
           </a:p>
           <a:p>
             <a:pPr lvl="1"/>
             <a:r>
-              <a:rPr lang="en-US" smtClean="0"/>
+              <a:rPr lang="en-US"/>
               <a:t>Second level</a:t>
             </a:r>
           </a:p>
           <a:p>
             <a:pPr lvl="2"/>
             <a:r>
-              <a:rPr lang="en-US" smtClean="0"/>
+              <a:rPr lang="en-US"/>
               <a:t>Third level</a:t>
             </a:r>
           </a:p>
           <a:p>
             <a:pPr lvl="3"/>
             <a:r>
-              <a:rPr lang="en-US" smtClean="0"/>
+              <a:rPr lang="en-US"/>
               <a:t>Fourth level</a:t>
             </a:r>
           </a:p>
           <a:p>
             <a:pPr lvl="4"/>
             <a:r>
-              <a:rPr lang="en-US" smtClean="0"/>
+              <a:rPr lang="en-US"/>
               <a:t>Fifth level</a:t>
             </a:r>
-            <a:endParaRPr lang="en-US"/>
           </a:p>
         </p:txBody>
       </p:sp>
@@ -645,7 +655,7 @@
           <a:p>
             <a:fld id="{5BCAD085-E8A6-8845-BD4E-CB4CCA059FC4}" type="datetimeFigureOut">
               <a:rPr lang="en-US" smtClean="0"/>
-              <a:t>1/27/13</a:t>
+              <a:t>5/11/26</a:t>
             </a:fld>
             <a:endParaRPr lang="en-US"/>
           </a:p>
@@ -739,10 +749,9 @@
           <a:lstStyle/>
           <a:p>
             <a:r>
-              <a:rPr lang="en-US" smtClean="0"/>
+              <a:rPr lang="en-US"/>
               <a:t>Click to edit Master title style</a:t>
             </a:r>
-            <a:endParaRPr lang="en-US"/>
           </a:p>
         </p:txBody>
       </p:sp>
@@ -763,38 +772,37 @@
           <a:p>
             <a:pPr lvl="0"/>
             <a:r>
-              <a:rPr lang="en-US" smtClean="0"/>
+              <a:rPr lang="en-US"/>
               <a:t>Click to edit Master text styles</a:t>
             </a:r>
           </a:p>
           <a:p>
             <a:pPr lvl="1"/>
             <a:r>
-              <a:rPr lang="en-US" smtClean="0"/>
+              <a:rPr lang="en-US"/>
               <a:t>Second level</a:t>
             </a:r>
           </a:p>
           <a:p>
             <a:pPr lvl="2"/>
             <a:r>
-              <a:rPr lang="en-US" smtClean="0"/>
+              <a:rPr lang="en-US"/>
               <a:t>Third level</a:t>
             </a:r>
           </a:p>
           <a:p>
             <a:pPr lvl="3"/>
             <a:r>
-              <a:rPr lang="en-US" smtClean="0"/>
+              <a:rPr lang="en-US"/>
               <a:t>Fourth level</a:t>
             </a:r>
           </a:p>
           <a:p>
             <a:pPr lvl="4"/>
             <a:r>
-              <a:rPr lang="en-US" smtClean="0"/>
+              <a:rPr lang="en-US"/>
               <a:t>Fifth level</a:t>
             </a:r>
-            <a:endParaRPr lang="en-US"/>
           </a:p>
         </p:txBody>
       </p:sp>
@@ -815,7 +823,7 @@
           <a:p>
             <a:fld id="{5BCAD085-E8A6-8845-BD4E-CB4CCA059FC4}" type="datetimeFigureOut">
               <a:rPr lang="en-US" smtClean="0"/>
-              <a:t>1/27/13</a:t>
+              <a:t>5/11/26</a:t>
             </a:fld>
             <a:endParaRPr lang="en-US"/>
           </a:p>
@@ -918,10 +926,9 @@
           </a:lstStyle>
           <a:p>
             <a:r>
-              <a:rPr lang="en-US" smtClean="0"/>
+              <a:rPr lang="en-US"/>
               <a:t>Click to edit Master title style</a:t>
             </a:r>
-            <a:endParaRPr lang="en-US"/>
           </a:p>
         </p:txBody>
       </p:sp>
@@ -1038,7 +1045,7 @@
           <a:p>
             <a:pPr lvl="0"/>
             <a:r>
-              <a:rPr lang="en-US" smtClean="0"/>
+              <a:rPr lang="en-US"/>
               <a:t>Click to edit Master text styles</a:t>
             </a:r>
           </a:p>
@@ -1061,7 +1068,7 @@
           <a:p>
             <a:fld id="{5BCAD085-E8A6-8845-BD4E-CB4CCA059FC4}" type="datetimeFigureOut">
               <a:rPr lang="en-US" smtClean="0"/>
-              <a:t>1/27/13</a:t>
+              <a:t>5/11/26</a:t>
             </a:fld>
             <a:endParaRPr lang="en-US"/>
           </a:p>
@@ -1155,10 +1162,9 @@
           <a:lstStyle/>
           <a:p>
             <a:r>
-              <a:rPr lang="en-US" smtClean="0"/>
+              <a:rPr lang="en-US"/>
               <a:t>Click to edit Master title style</a:t>
             </a:r>
-            <a:endParaRPr lang="en-US"/>
           </a:p>
         </p:txBody>
       </p:sp>
@@ -1212,38 +1218,37 @@
           <a:p>
             <a:pPr lvl="0"/>
             <a:r>
-              <a:rPr lang="en-US" smtClean="0"/>
+              <a:rPr lang="en-US"/>
               <a:t>Click to edit Master text styles</a:t>
             </a:r>
           </a:p>
           <a:p>
             <a:pPr lvl="1"/>
             <a:r>
-              <a:rPr lang="en-US" smtClean="0"/>
+              <a:rPr lang="en-US"/>
               <a:t>Second level</a:t>
             </a:r>
           </a:p>
           <a:p>
             <a:pPr lvl="2"/>
             <a:r>
-              <a:rPr lang="en-US" smtClean="0"/>
+              <a:rPr lang="en-US"/>
               <a:t>Third level</a:t>
             </a:r>
           </a:p>
           <a:p>
             <a:pPr lvl="3"/>
             <a:r>
-              <a:rPr lang="en-US" smtClean="0"/>
+              <a:rPr lang="en-US"/>
               <a:t>Fourth level</a:t>
             </a:r>
           </a:p>
           <a:p>
             <a:pPr lvl="4"/>
             <a:r>
-              <a:rPr lang="en-US" smtClean="0"/>
+              <a:rPr lang="en-US"/>
               <a:t>Fifth level</a:t>
             </a:r>
-            <a:endParaRPr lang="en-US"/>
           </a:p>
         </p:txBody>
       </p:sp>
@@ -1297,38 +1302,37 @@
           <a:p>
             <a:pPr lvl="0"/>
             <a:r>
-              <a:rPr lang="en-US" smtClean="0"/>
+              <a:rPr lang="en-US"/>
               <a:t>Click to edit Master text styles</a:t>
             </a:r>
           </a:p>
           <a:p>
             <a:pPr lvl="1"/>
             <a:r>
-              <a:rPr lang="en-US" smtClean="0"/>
+              <a:rPr lang="en-US"/>
               <a:t>Second level</a:t>
             </a:r>
           </a:p>
           <a:p>
             <a:pPr lvl="2"/>
             <a:r>
-              <a:rPr lang="en-US" smtClean="0"/>
+              <a:rPr lang="en-US"/>
               <a:t>Third level</a:t>
             </a:r>
           </a:p>
           <a:p>
             <a:pPr lvl="3"/>
             <a:r>
-              <a:rPr lang="en-US" smtClean="0"/>
+              <a:rPr lang="en-US"/>
               <a:t>Fourth level</a:t>
             </a:r>
           </a:p>
           <a:p>
             <a:pPr lvl="4"/>
             <a:r>
-              <a:rPr lang="en-US" smtClean="0"/>
+              <a:rPr lang="en-US"/>
               <a:t>Fifth level</a:t>
             </a:r>
-            <a:endParaRPr lang="en-US"/>
           </a:p>
         </p:txBody>
       </p:sp>
@@ -1349,7 +1353,7 @@
           <a:p>
             <a:fld id="{5BCAD085-E8A6-8845-BD4E-CB4CCA059FC4}" type="datetimeFigureOut">
               <a:rPr lang="en-US" smtClean="0"/>
-              <a:t>1/27/13</a:t>
+              <a:t>5/11/26</a:t>
             </a:fld>
             <a:endParaRPr lang="en-US"/>
           </a:p>
@@ -1447,10 +1451,9 @@
           </a:lstStyle>
           <a:p>
             <a:r>
-              <a:rPr lang="en-US" smtClean="0"/>
+              <a:rPr lang="en-US"/>
               <a:t>Click to edit Master title style</a:t>
             </a:r>
-            <a:endParaRPr lang="en-US"/>
           </a:p>
         </p:txBody>
       </p:sp>
@@ -1513,7 +1516,7 @@
           <a:p>
             <a:pPr lvl="0"/>
             <a:r>
-              <a:rPr lang="en-US" smtClean="0"/>
+              <a:rPr lang="en-US"/>
               <a:t>Click to edit Master text styles</a:t>
             </a:r>
           </a:p>
@@ -1569,38 +1572,37 @@
           <a:p>
             <a:pPr lvl="0"/>
             <a:r>
-              <a:rPr lang="en-US" smtClean="0"/>
+              <a:rPr lang="en-US"/>
               <a:t>Click to edit Master text styles</a:t>
             </a:r>
           </a:p>
           <a:p>
             <a:pPr lvl="1"/>
             <a:r>
-              <a:rPr lang="en-US" smtClean="0"/>
+              <a:rPr lang="en-US"/>
               <a:t>Second level</a:t>
             </a:r>
           </a:p>
           <a:p>
             <a:pPr lvl="2"/>
             <a:r>
-              <a:rPr lang="en-US" smtClean="0"/>
+              <a:rPr lang="en-US"/>
               <a:t>Third level</a:t>
             </a:r>
           </a:p>
           <a:p>
             <a:pPr lvl="3"/>
             <a:r>
-              <a:rPr lang="en-US" smtClean="0"/>
+              <a:rPr lang="en-US"/>
               <a:t>Fourth level</a:t>
             </a:r>
           </a:p>
           <a:p>
             <a:pPr lvl="4"/>
             <a:r>
-              <a:rPr lang="en-US" smtClean="0"/>
+              <a:rPr lang="en-US"/>
               <a:t>Fifth level</a:t>
             </a:r>
-            <a:endParaRPr lang="en-US"/>
           </a:p>
         </p:txBody>
       </p:sp>
@@ -1663,7 +1665,7 @@
           <a:p>
             <a:pPr lvl="0"/>
             <a:r>
-              <a:rPr lang="en-US" smtClean="0"/>
+              <a:rPr lang="en-US"/>
               <a:t>Click to edit Master text styles</a:t>
             </a:r>
           </a:p>
@@ -1719,38 +1721,37 @@
           <a:p>
             <a:pPr lvl="0"/>
             <a:r>
-              <a:rPr lang="en-US" smtClean="0"/>
+              <a:rPr lang="en-US"/>
               <a:t>Click to edit Master text styles</a:t>
             </a:r>
           </a:p>
           <a:p>
             <a:pPr lvl="1"/>
             <a:r>
-              <a:rPr lang="en-US" smtClean="0"/>
+              <a:rPr lang="en-US"/>
               <a:t>Second level</a:t>
             </a:r>
           </a:p>
           <a:p>
             <a:pPr lvl="2"/>
             <a:r>
-              <a:rPr lang="en-US" smtClean="0"/>
+              <a:rPr lang="en-US"/>
               <a:t>Third level</a:t>
             </a:r>
           </a:p>
           <a:p>
             <a:pPr lvl="3"/>
             <a:r>
-              <a:rPr lang="en-US" smtClean="0"/>
+              <a:rPr lang="en-US"/>
               <a:t>Fourth level</a:t>
             </a:r>
           </a:p>
           <a:p>
             <a:pPr lvl="4"/>
             <a:r>
-              <a:rPr lang="en-US" smtClean="0"/>
+              <a:rPr lang="en-US"/>
               <a:t>Fifth level</a:t>
             </a:r>
-            <a:endParaRPr lang="en-US"/>
           </a:p>
         </p:txBody>
       </p:sp>
@@ -1771,7 +1772,7 @@
           <a:p>
             <a:fld id="{5BCAD085-E8A6-8845-BD4E-CB4CCA059FC4}" type="datetimeFigureOut">
               <a:rPr lang="en-US" smtClean="0"/>
-              <a:t>1/27/13</a:t>
+              <a:t>5/11/26</a:t>
             </a:fld>
             <a:endParaRPr lang="en-US"/>
           </a:p>
@@ -1865,10 +1866,9 @@
           <a:lstStyle/>
           <a:p>
             <a:r>
-              <a:rPr lang="en-US" smtClean="0"/>
+              <a:rPr lang="en-US"/>
               <a:t>Click to edit Master title style</a:t>
             </a:r>
-            <a:endParaRPr lang="en-US"/>
           </a:p>
         </p:txBody>
       </p:sp>
@@ -1889,7 +1889,7 @@
           <a:p>
             <a:fld id="{5BCAD085-E8A6-8845-BD4E-CB4CCA059FC4}" type="datetimeFigureOut">
               <a:rPr lang="en-US" smtClean="0"/>
-              <a:t>1/27/13</a:t>
+              <a:t>5/11/26</a:t>
             </a:fld>
             <a:endParaRPr lang="en-US"/>
           </a:p>
@@ -1984,7 +1984,7 @@
           <a:p>
             <a:fld id="{5BCAD085-E8A6-8845-BD4E-CB4CCA059FC4}" type="datetimeFigureOut">
               <a:rPr lang="en-US" smtClean="0"/>
-              <a:t>1/27/13</a:t>
+              <a:t>5/11/26</a:t>
             </a:fld>
             <a:endParaRPr lang="en-US"/>
           </a:p>
@@ -2087,10 +2087,9 @@
           </a:lstStyle>
           <a:p>
             <a:r>
-              <a:rPr lang="en-US" smtClean="0"/>
+              <a:rPr lang="en-US"/>
               <a:t>Click to edit Master title style</a:t>
             </a:r>
-            <a:endParaRPr lang="en-US"/>
           </a:p>
         </p:txBody>
       </p:sp>
@@ -2144,38 +2143,37 @@
           <a:p>
             <a:pPr lvl="0"/>
             <a:r>
-              <a:rPr lang="en-US" smtClean="0"/>
+              <a:rPr lang="en-US"/>
               <a:t>Click to edit Master text styles</a:t>
             </a:r>
           </a:p>
           <a:p>
             <a:pPr lvl="1"/>
             <a:r>
-              <a:rPr lang="en-US" smtClean="0"/>
+              <a:rPr lang="en-US"/>
               <a:t>Second level</a:t>
             </a:r>
           </a:p>
           <a:p>
             <a:pPr lvl="2"/>
             <a:r>
-              <a:rPr lang="en-US" smtClean="0"/>
+              <a:rPr lang="en-US"/>
               <a:t>Third level</a:t>
             </a:r>
           </a:p>
           <a:p>
             <a:pPr lvl="3"/>
             <a:r>
-              <a:rPr lang="en-US" smtClean="0"/>
+              <a:rPr lang="en-US"/>
               <a:t>Fourth level</a:t>
             </a:r>
           </a:p>
           <a:p>
             <a:pPr lvl="4"/>
             <a:r>
-              <a:rPr lang="en-US" smtClean="0"/>
+              <a:rPr lang="en-US"/>
               <a:t>Fifth level</a:t>
             </a:r>
-            <a:endParaRPr lang="en-US"/>
           </a:p>
         </p:txBody>
       </p:sp>
@@ -2238,7 +2236,7 @@
           <a:p>
             <a:pPr lvl="0"/>
             <a:r>
-              <a:rPr lang="en-US" smtClean="0"/>
+              <a:rPr lang="en-US"/>
               <a:t>Click to edit Master text styles</a:t>
             </a:r>
           </a:p>
@@ -2261,7 +2259,7 @@
           <a:p>
             <a:fld id="{5BCAD085-E8A6-8845-BD4E-CB4CCA059FC4}" type="datetimeFigureOut">
               <a:rPr lang="en-US" smtClean="0"/>
-              <a:t>1/27/13</a:t>
+              <a:t>5/11/26</a:t>
             </a:fld>
             <a:endParaRPr lang="en-US"/>
           </a:p>
@@ -2364,10 +2362,9 @@
           </a:lstStyle>
           <a:p>
             <a:r>
-              <a:rPr lang="en-US" smtClean="0"/>
+              <a:rPr lang="en-US"/>
               <a:t>Click to edit Master title style</a:t>
             </a:r>
-            <a:endParaRPr lang="en-US"/>
           </a:p>
         </p:txBody>
       </p:sp>
@@ -2491,7 +2488,7 @@
           <a:p>
             <a:pPr lvl="0"/>
             <a:r>
-              <a:rPr lang="en-US" smtClean="0"/>
+              <a:rPr lang="en-US"/>
               <a:t>Click to edit Master text styles</a:t>
             </a:r>
           </a:p>
@@ -2514,7 +2511,7 @@
           <a:p>
             <a:fld id="{5BCAD085-E8A6-8845-BD4E-CB4CCA059FC4}" type="datetimeFigureOut">
               <a:rPr lang="en-US" smtClean="0"/>
-              <a:t>1/27/13</a:t>
+              <a:t>5/11/26</a:t>
             </a:fld>
             <a:endParaRPr lang="en-US"/>
           </a:p>
@@ -2623,10 +2620,9 @@
           <a:lstStyle/>
           <a:p>
             <a:r>
-              <a:rPr lang="en-US" smtClean="0"/>
+              <a:rPr lang="en-US"/>
               <a:t>Click to edit Master title style</a:t>
             </a:r>
-            <a:endParaRPr lang="en-US"/>
           </a:p>
         </p:txBody>
       </p:sp>
@@ -2657,38 +2653,37 @@
           <a:p>
             <a:pPr lvl="0"/>
             <a:r>
-              <a:rPr lang="en-US" smtClean="0"/>
+              <a:rPr lang="en-US"/>
               <a:t>Click to edit Master text styles</a:t>
             </a:r>
           </a:p>
           <a:p>
             <a:pPr lvl="1"/>
             <a:r>
-              <a:rPr lang="en-US" smtClean="0"/>
+              <a:rPr lang="en-US"/>
               <a:t>Second level</a:t>
             </a:r>
           </a:p>
           <a:p>
             <a:pPr lvl="2"/>
             <a:r>
-              <a:rPr lang="en-US" smtClean="0"/>
+              <a:rPr lang="en-US"/>
               <a:t>Third level</a:t>
             </a:r>
           </a:p>
           <a:p>
             <a:pPr lvl="3"/>
             <a:r>
-              <a:rPr lang="en-US" smtClean="0"/>
+              <a:rPr lang="en-US"/>
               <a:t>Fourth level</a:t>
             </a:r>
           </a:p>
           <a:p>
             <a:pPr lvl="4"/>
             <a:r>
-              <a:rPr lang="en-US" smtClean="0"/>
+              <a:rPr lang="en-US"/>
               <a:t>Fifth level</a:t>
             </a:r>
-            <a:endParaRPr lang="en-US"/>
           </a:p>
         </p:txBody>
       </p:sp>
@@ -2727,7 +2722,7 @@
           <a:p>
             <a:fld id="{5BCAD085-E8A6-8845-BD4E-CB4CCA059FC4}" type="datetimeFigureOut">
               <a:rPr lang="en-US" smtClean="0"/>
-              <a:t>1/27/13</a:t>
+              <a:t>5/11/26</a:t>
             </a:fld>
             <a:endParaRPr lang="en-US"/>
           </a:p>
@@ -3086,7 +3081,7 @@
 </file>
 
 <file path=ppt/slides/slide1.xml><?xml version="1.0" encoding="utf-8"?>
-<p:sld xmlns:a="http://schemas.openxmlformats.org/drawingml/2006/main" xmlns:p="http://schemas.openxmlformats.org/presentationml/2006/main" xmlns:r="http://schemas.openxmlformats.org/officeDocument/2006/relationships">
+<p:sld xmlns:a="http://schemas.openxmlformats.org/drawingml/2006/main" xmlns:r="http://schemas.openxmlformats.org/officeDocument/2006/relationships" xmlns:p="http://schemas.openxmlformats.org/presentationml/2006/main">
   <p:cSld>
     <p:bg>
       <p:bgPr>
@@ -3102,7 +3097,14 @@
         <p:cNvGrpSpPr/>
         <p:nvPr/>
       </p:nvGrpSpPr>
-      <p:grpSpPr/>
+      <p:grpSpPr>
+        <a:xfrm>
+          <a:off x="0" y="0"/>
+          <a:ext cx="0" cy="0"/>
+          <a:chOff x="0" y="0"/>
+          <a:chExt cx="0" cy="0"/>
+        </a:xfrm>
+      </p:grpSpPr>
       <p:pic>
         <p:nvPicPr>
           <p:cNvPr id="2" name="Picture 1" descr="fracto_logo.png"/>
@@ -3144,7 +3146,7 @@
           <a:noFill/>
         </p:spPr>
         <p:txBody>
-          <a:bodyPr wrap="square" lIns="25400" rIns="25400" tIns="12700" bIns="12700">
+          <a:bodyPr wrap="square" lIns="25400" tIns="12700" rIns="25400" bIns="12700">
             <a:normAutofit/>
           </a:bodyPr>
           <a:lstStyle/>
@@ -3179,7 +3181,7 @@
           <a:noFill/>
         </p:spPr>
         <p:txBody>
-          <a:bodyPr wrap="square" lIns="25400" rIns="25400" tIns="12700" bIns="12700">
+          <a:bodyPr wrap="square" lIns="25400" tIns="12700" rIns="25400" bIns="12700">
             <a:normAutofit/>
           </a:bodyPr>
           <a:lstStyle/>
@@ -3214,7 +3216,7 @@
           <a:noFill/>
         </p:spPr>
         <p:txBody>
-          <a:bodyPr wrap="square" lIns="25400" rIns="25400" tIns="12700" bIns="12700">
+          <a:bodyPr wrap="square" lIns="25400" tIns="12700" rIns="25400" bIns="12700">
             <a:normAutofit/>
           </a:bodyPr>
           <a:lstStyle/>
@@ -3274,6 +3276,7 @@
           <a:lstStyle/>
           <a:p>
             <a:pPr algn="ctr"/>
+            <a:endParaRPr/>
           </a:p>
         </p:txBody>
       </p:sp>
@@ -3294,7 +3297,7 @@
           <a:noFill/>
         </p:spPr>
         <p:txBody>
-          <a:bodyPr wrap="square" lIns="25400" rIns="25400" tIns="12700" bIns="12700">
+          <a:bodyPr wrap="square" lIns="25400" tIns="12700" rIns="25400" bIns="12700">
             <a:normAutofit/>
           </a:bodyPr>
           <a:lstStyle/>
@@ -3329,7 +3332,7 @@
           <a:noFill/>
         </p:spPr>
         <p:txBody>
-          <a:bodyPr wrap="square" lIns="25400" rIns="25400" tIns="12700" bIns="12700">
+          <a:bodyPr wrap="square" lIns="25400" tIns="12700" rIns="25400" bIns="12700">
             <a:normAutofit/>
           </a:bodyPr>
           <a:lstStyle/>
@@ -3355,16 +3358,16 @@
         </p:nvSpPr>
         <p:spPr>
           <a:xfrm>
-            <a:off x="658368" y="2670048"/>
-            <a:ext cx="5532120" cy="658368"/>
-          </a:xfrm>
-          <a:prstGeom prst="rect">
-            <a:avLst/>
-          </a:prstGeom>
-          <a:noFill/>
-        </p:spPr>
-        <p:txBody>
-          <a:bodyPr wrap="square" lIns="25400" rIns="25400" tIns="12700" bIns="12700">
+            <a:off x="658368" y="2372868"/>
+            <a:ext cx="5532120" cy="955548"/>
+          </a:xfrm>
+          <a:prstGeom prst="rect">
+            <a:avLst/>
+          </a:prstGeom>
+          <a:noFill/>
+        </p:spPr>
+        <p:txBody>
+          <a:bodyPr wrap="square" lIns="25400" tIns="12700" rIns="25400" bIns="12700" anchor="b">
             <a:normAutofit/>
           </a:bodyPr>
           <a:lstStyle/>
@@ -3426,6 +3429,7 @@
           <a:lstStyle/>
           <a:p>
             <a:pPr algn="ctr"/>
+            <a:endParaRPr/>
           </a:p>
         </p:txBody>
       </p:sp>
@@ -3446,7 +3450,7 @@
           <a:noFill/>
         </p:spPr>
         <p:txBody>
-          <a:bodyPr wrap="square" lIns="50800" rIns="50800" tIns="25400" bIns="25400">
+          <a:bodyPr wrap="square" lIns="50800" tIns="25400" rIns="50800" bIns="25400">
             <a:normAutofit/>
           </a:bodyPr>
           <a:lstStyle/>
@@ -3560,6 +3564,7 @@
           <a:lstStyle/>
           <a:p>
             <a:pPr algn="ctr"/>
+            <a:endParaRPr/>
           </a:p>
         </p:txBody>
       </p:sp>
@@ -3571,7 +3576,7 @@
         </p:nvSpPr>
         <p:spPr>
           <a:xfrm>
-            <a:off x="704088" y="4960620"/>
+            <a:off x="704088" y="4976622"/>
             <a:ext cx="1554480" cy="164592"/>
           </a:xfrm>
           <a:prstGeom prst="rect">
@@ -3580,21 +3585,27 @@
           <a:noFill/>
         </p:spPr>
         <p:txBody>
-          <a:bodyPr wrap="square" lIns="25400" rIns="25400" tIns="12700" bIns="12700">
+          <a:bodyPr wrap="square" lIns="25400" tIns="12700" rIns="25400" bIns="12700">
             <a:normAutofit/>
           </a:bodyPr>
           <a:lstStyle/>
           <a:p>
             <a:pPr algn="ctr"/>
             <a:r>
-              <a:rPr sz="850" b="1">
+              <a:rPr lang="en-US" sz="850" b="1" dirty="0">
                 <a:solidFill>
                   <a:srgbClr val="324463"/>
                 </a:solidFill>
                 <a:latin typeface="IBM Plex Sans"/>
               </a:rPr>
-              <a:t>{{primary_workflow}}</a:t>
-            </a:r>
+              <a:t>Extract/Verify</a:t>
+            </a:r>
+            <a:endParaRPr sz="850" b="1" dirty="0">
+              <a:solidFill>
+                <a:srgbClr val="324463"/>
+              </a:solidFill>
+              <a:latin typeface="IBM Plex Sans"/>
+            </a:endParaRPr>
           </a:p>
         </p:txBody>
       </p:sp>
@@ -3642,6 +3653,7 @@
           <a:lstStyle/>
           <a:p>
             <a:pPr algn="ctr"/>
+            <a:endParaRPr/>
           </a:p>
         </p:txBody>
       </p:sp>
@@ -3653,7 +3665,7 @@
         </p:nvSpPr>
         <p:spPr>
           <a:xfrm>
-            <a:off x="2487168" y="4960620"/>
+            <a:off x="2487171" y="4972050"/>
             <a:ext cx="868680" cy="164592"/>
           </a:xfrm>
           <a:prstGeom prst="rect">
@@ -3662,14 +3674,14 @@
           <a:noFill/>
         </p:spPr>
         <p:txBody>
-          <a:bodyPr wrap="square" lIns="25400" rIns="25400" tIns="12700" bIns="12700">
+          <a:bodyPr wrap="square" lIns="25400" tIns="12700" rIns="25400" bIns="12700">
             <a:normAutofit/>
           </a:bodyPr>
           <a:lstStyle/>
           <a:p>
             <a:pPr algn="ctr"/>
             <a:r>
-              <a:rPr sz="850" b="1">
+              <a:rPr sz="850" b="1" dirty="0">
                 <a:solidFill>
                   <a:srgbClr val="324463"/>
                 </a:solidFill>
@@ -3724,6 +3736,7 @@
           <a:lstStyle/>
           <a:p>
             <a:pPr algn="ctr"/>
+            <a:endParaRPr/>
           </a:p>
         </p:txBody>
       </p:sp>
@@ -3735,7 +3748,7 @@
         </p:nvSpPr>
         <p:spPr>
           <a:xfrm>
-            <a:off x="3593591" y="4960620"/>
+            <a:off x="3593594" y="4972050"/>
             <a:ext cx="1005839" cy="164592"/>
           </a:xfrm>
           <a:prstGeom prst="rect">
@@ -3744,14 +3757,14 @@
           <a:noFill/>
         </p:spPr>
         <p:txBody>
-          <a:bodyPr wrap="square" lIns="25400" rIns="25400" tIns="12700" bIns="12700">
+          <a:bodyPr wrap="square" lIns="25400" tIns="12700" rIns="25400" bIns="12700">
             <a:normAutofit/>
           </a:bodyPr>
           <a:lstStyle/>
           <a:p>
             <a:pPr algn="ctr"/>
             <a:r>
-              <a:rPr sz="850" b="1">
+              <a:rPr sz="850" b="1" dirty="0">
                 <a:solidFill>
                   <a:srgbClr val="324463"/>
                 </a:solidFill>
@@ -3806,6 +3819,7 @@
           <a:lstStyle/>
           <a:p>
             <a:pPr algn="ctr"/>
+            <a:endParaRPr/>
           </a:p>
         </p:txBody>
       </p:sp>
@@ -3817,7 +3831,7 @@
         </p:nvSpPr>
         <p:spPr>
           <a:xfrm>
-            <a:off x="704088" y="5353812"/>
+            <a:off x="704088" y="5372100"/>
             <a:ext cx="868680" cy="164592"/>
           </a:xfrm>
           <a:prstGeom prst="rect">
@@ -3826,14 +3840,14 @@
           <a:noFill/>
         </p:spPr>
         <p:txBody>
-          <a:bodyPr wrap="square" lIns="25400" rIns="25400" tIns="12700" bIns="12700">
+          <a:bodyPr wrap="square" lIns="25400" tIns="12700" rIns="25400" bIns="12700">
             <a:normAutofit/>
           </a:bodyPr>
           <a:lstStyle/>
           <a:p>
             <a:pPr algn="ctr"/>
             <a:r>
-              <a:rPr sz="850" b="1">
+              <a:rPr sz="850" b="1" dirty="0">
                 <a:solidFill>
                   <a:srgbClr val="324463"/>
                 </a:solidFill>
@@ -3888,6 +3902,7 @@
           <a:lstStyle/>
           <a:p>
             <a:pPr algn="ctr"/>
+            <a:endParaRPr/>
           </a:p>
         </p:txBody>
       </p:sp>
@@ -3899,7 +3914,7 @@
         </p:nvSpPr>
         <p:spPr>
           <a:xfrm>
-            <a:off x="1810512" y="5353812"/>
+            <a:off x="1810512" y="5372100"/>
             <a:ext cx="1463039" cy="164592"/>
           </a:xfrm>
           <a:prstGeom prst="rect">
@@ -3908,21 +3923,27 @@
           <a:noFill/>
         </p:spPr>
         <p:txBody>
-          <a:bodyPr wrap="square" lIns="25400" rIns="25400" tIns="12700" bIns="12700">
+          <a:bodyPr wrap="square" lIns="25400" tIns="12700" rIns="25400" bIns="12700">
             <a:normAutofit/>
           </a:bodyPr>
           <a:lstStyle/>
           <a:p>
             <a:pPr algn="ctr"/>
             <a:r>
-              <a:rPr sz="850" b="1">
+              <a:rPr lang="en-US" sz="850" b="1" dirty="0">
                 <a:solidFill>
                   <a:srgbClr val="324463"/>
                 </a:solidFill>
                 <a:latin typeface="IBM Plex Sans"/>
               </a:rPr>
-              <a:t>For {{prospect_role}}</a:t>
-            </a:r>
+              <a:t>Aadhar Masking</a:t>
+            </a:r>
+            <a:endParaRPr sz="850" b="1" dirty="0">
+              <a:solidFill>
+                <a:srgbClr val="324463"/>
+              </a:solidFill>
+              <a:latin typeface="IBM Plex Sans"/>
+            </a:endParaRPr>
           </a:p>
         </p:txBody>
       </p:sp>
@@ -3935,7 +3956,7 @@
         <p:spPr>
           <a:xfrm>
             <a:off x="6400800" y="932688"/>
-            <a:ext cx="3611880" cy="4315968"/>
+            <a:ext cx="3611880" cy="4192524"/>
           </a:xfrm>
           <a:prstGeom prst="roundRect">
             <a:avLst>
@@ -3970,6 +3991,7 @@
           <a:lstStyle/>
           <a:p>
             <a:pPr algn="ctr"/>
+            <a:endParaRPr/>
           </a:p>
         </p:txBody>
       </p:sp>
@@ -3990,7 +4012,7 @@
           <a:noFill/>
         </p:spPr>
         <p:txBody>
-          <a:bodyPr wrap="square" lIns="25400" rIns="25400" tIns="12700" bIns="12700">
+          <a:bodyPr wrap="square" lIns="25400" tIns="12700" rIns="25400" bIns="12700">
             <a:normAutofit/>
           </a:bodyPr>
           <a:lstStyle/>
@@ -4052,6 +4074,7 @@
           <a:lstStyle/>
           <a:p>
             <a:pPr algn="ctr"/>
+            <a:endParaRPr/>
           </a:p>
         </p:txBody>
       </p:sp>
@@ -4072,7 +4095,7 @@
           <a:noFill/>
         </p:spPr>
         <p:txBody>
-          <a:bodyPr wrap="square" lIns="25400" rIns="25400" tIns="12700" bIns="12700">
+          <a:bodyPr wrap="square" lIns="25400" tIns="12700" rIns="25400" bIns="12700">
             <a:normAutofit/>
           </a:bodyPr>
           <a:lstStyle/>
@@ -4107,7 +4130,7 @@
           <a:noFill/>
         </p:spPr>
         <p:txBody>
-          <a:bodyPr wrap="square" lIns="25400" rIns="25400" tIns="12700" bIns="12700">
+          <a:bodyPr wrap="square" lIns="25400" tIns="12700" rIns="25400" bIns="12700">
             <a:normAutofit/>
           </a:bodyPr>
           <a:lstStyle/>
@@ -4169,6 +4192,7 @@
           <a:lstStyle/>
           <a:p>
             <a:pPr algn="ctr"/>
+            <a:endParaRPr/>
           </a:p>
         </p:txBody>
       </p:sp>
@@ -4189,7 +4213,7 @@
           <a:noFill/>
         </p:spPr>
         <p:txBody>
-          <a:bodyPr wrap="square" lIns="25400" rIns="25400" tIns="12700" bIns="12700">
+          <a:bodyPr wrap="square" lIns="25400" tIns="12700" rIns="25400" bIns="12700">
             <a:normAutofit/>
           </a:bodyPr>
           <a:lstStyle/>
@@ -4224,7 +4248,7 @@
           <a:noFill/>
         </p:spPr>
         <p:txBody>
-          <a:bodyPr wrap="square" lIns="25400" rIns="25400" tIns="12700" bIns="12700">
+          <a:bodyPr wrap="square" lIns="25400" tIns="12700" rIns="25400" bIns="12700">
             <a:normAutofit/>
           </a:bodyPr>
           <a:lstStyle/>
@@ -4286,6 +4310,7 @@
           <a:lstStyle/>
           <a:p>
             <a:pPr algn="ctr"/>
+            <a:endParaRPr/>
           </a:p>
         </p:txBody>
       </p:sp>
@@ -4306,7 +4331,7 @@
           <a:noFill/>
         </p:spPr>
         <p:txBody>
-          <a:bodyPr wrap="square" lIns="25400" rIns="25400" tIns="12700" bIns="12700">
+          <a:bodyPr wrap="square" lIns="25400" tIns="12700" rIns="25400" bIns="12700">
             <a:normAutofit/>
           </a:bodyPr>
           <a:lstStyle/>
@@ -4341,7 +4366,7 @@
           <a:noFill/>
         </p:spPr>
         <p:txBody>
-          <a:bodyPr wrap="square" lIns="25400" rIns="25400" tIns="12700" bIns="12700">
+          <a:bodyPr wrap="square" lIns="25400" tIns="12700" rIns="25400" bIns="12700">
             <a:normAutofit/>
           </a:bodyPr>
           <a:lstStyle/>
@@ -4403,6 +4428,7 @@
           <a:lstStyle/>
           <a:p>
             <a:pPr algn="ctr"/>
+            <a:endParaRPr/>
           </a:p>
         </p:txBody>
       </p:sp>
@@ -4423,7 +4449,7 @@
           <a:noFill/>
         </p:spPr>
         <p:txBody>
-          <a:bodyPr wrap="square" lIns="25400" rIns="25400" tIns="12700" bIns="12700">
+          <a:bodyPr wrap="square" lIns="25400" tIns="12700" rIns="25400" bIns="12700">
             <a:normAutofit/>
           </a:bodyPr>
           <a:lstStyle/>
@@ -4458,7 +4484,7 @@
           <a:noFill/>
         </p:spPr>
         <p:txBody>
-          <a:bodyPr wrap="square" lIns="25400" rIns="25400" tIns="12700" bIns="12700">
+          <a:bodyPr wrap="square" lIns="25400" tIns="12700" rIns="25400" bIns="12700">
             <a:normAutofit/>
           </a:bodyPr>
           <a:lstStyle/>
@@ -4520,6 +4546,7 @@
           <a:lstStyle/>
           <a:p>
             <a:pPr algn="ctr"/>
+            <a:endParaRPr/>
           </a:p>
         </p:txBody>
       </p:sp>
@@ -4540,7 +4567,7 @@
           <a:noFill/>
         </p:spPr>
         <p:txBody>
-          <a:bodyPr wrap="square" lIns="25400" rIns="25400" tIns="12700" bIns="12700">
+          <a:bodyPr wrap="square" lIns="25400" tIns="12700" rIns="25400" bIns="12700">
             <a:normAutofit/>
           </a:bodyPr>
           <a:lstStyle/>
@@ -4575,7 +4602,7 @@
           <a:noFill/>
         </p:spPr>
         <p:txBody>
-          <a:bodyPr wrap="square" lIns="25400" rIns="25400" tIns="12700" bIns="12700">
+          <a:bodyPr wrap="square" lIns="25400" tIns="12700" rIns="25400" bIns="12700">
             <a:normAutofit/>
           </a:bodyPr>
           <a:lstStyle/>
@@ -4602,7 +4629,7 @@
 </file>
 
 <file path=ppt/slides/slide2.xml><?xml version="1.0" encoding="utf-8"?>
-<p:sld xmlns:a="http://schemas.openxmlformats.org/drawingml/2006/main" xmlns:p="http://schemas.openxmlformats.org/presentationml/2006/main" xmlns:r="http://schemas.openxmlformats.org/officeDocument/2006/relationships">
+<p:sld xmlns:a="http://schemas.openxmlformats.org/drawingml/2006/main" xmlns:r="http://schemas.openxmlformats.org/officeDocument/2006/relationships" xmlns:p="http://schemas.openxmlformats.org/presentationml/2006/main">
   <p:cSld>
     <p:bg>
       <p:bgPr>
@@ -4618,7 +4645,14 @@
         <p:cNvGrpSpPr/>
         <p:nvPr/>
       </p:nvGrpSpPr>
-      <p:grpSpPr/>
+      <p:grpSpPr>
+        <a:xfrm>
+          <a:off x="0" y="0"/>
+          <a:ext cx="0" cy="0"/>
+          <a:chOff x="0" y="0"/>
+          <a:chExt cx="0" cy="0"/>
+        </a:xfrm>
+      </p:grpSpPr>
       <p:pic>
         <p:nvPicPr>
           <p:cNvPr id="2" name="Picture 1" descr="fracto_logo.png"/>
@@ -4660,7 +4694,7 @@
           <a:noFill/>
         </p:spPr>
         <p:txBody>
-          <a:bodyPr wrap="square" lIns="25400" rIns="25400" tIns="12700" bIns="12700">
+          <a:bodyPr wrap="square" lIns="25400" tIns="12700" rIns="25400" bIns="12700">
             <a:normAutofit/>
           </a:bodyPr>
           <a:lstStyle/>
@@ -4695,7 +4729,7 @@
           <a:noFill/>
         </p:spPr>
         <p:txBody>
-          <a:bodyPr wrap="square" lIns="25400" rIns="25400" tIns="12700" bIns="12700">
+          <a:bodyPr wrap="square" lIns="25400" tIns="12700" rIns="25400" bIns="12700">
             <a:normAutofit/>
           </a:bodyPr>
           <a:lstStyle/>
@@ -4730,7 +4764,7 @@
           <a:noFill/>
         </p:spPr>
         <p:txBody>
-          <a:bodyPr wrap="square" lIns="25400" rIns="25400" tIns="12700" bIns="12700">
+          <a:bodyPr wrap="square" lIns="25400" tIns="12700" rIns="25400" bIns="12700">
             <a:normAutofit/>
           </a:bodyPr>
           <a:lstStyle/>
@@ -4790,6 +4824,7 @@
           <a:lstStyle/>
           <a:p>
             <a:pPr algn="ctr"/>
+            <a:endParaRPr/>
           </a:p>
         </p:txBody>
       </p:sp>
@@ -4810,7 +4845,7 @@
           <a:noFill/>
         </p:spPr>
         <p:txBody>
-          <a:bodyPr wrap="square" lIns="25400" rIns="25400" tIns="12700" bIns="12700">
+          <a:bodyPr wrap="square" lIns="25400" tIns="12700" rIns="25400" bIns="12700">
             <a:normAutofit/>
           </a:bodyPr>
           <a:lstStyle/>
@@ -4845,7 +4880,7 @@
           <a:noFill/>
         </p:spPr>
         <p:txBody>
-          <a:bodyPr wrap="square" lIns="25400" rIns="25400" tIns="12700" bIns="12700">
+          <a:bodyPr wrap="square" lIns="25400" tIns="12700" rIns="25400" bIns="12700">
             <a:normAutofit/>
           </a:bodyPr>
           <a:lstStyle/>
@@ -4871,16 +4906,16 @@
         </p:nvSpPr>
         <p:spPr>
           <a:xfrm>
-            <a:off x="658368" y="2359152"/>
-            <a:ext cx="5166360" cy="384048"/>
-          </a:xfrm>
-          <a:prstGeom prst="rect">
-            <a:avLst/>
-          </a:prstGeom>
-          <a:noFill/>
-        </p:spPr>
-        <p:txBody>
-          <a:bodyPr wrap="square" lIns="25400" rIns="25400" tIns="12700" bIns="12700">
+            <a:off x="658368" y="2048256"/>
+            <a:ext cx="5166360" cy="694944"/>
+          </a:xfrm>
+          <a:prstGeom prst="rect">
+            <a:avLst/>
+          </a:prstGeom>
+          <a:noFill/>
+        </p:spPr>
+        <p:txBody>
+          <a:bodyPr wrap="square" lIns="25400" tIns="12700" rIns="25400" bIns="12700" anchor="b">
             <a:normAutofit/>
           </a:bodyPr>
           <a:lstStyle/>
@@ -4942,6 +4977,7 @@
           <a:lstStyle/>
           <a:p>
             <a:pPr algn="ctr"/>
+            <a:endParaRPr/>
           </a:p>
         </p:txBody>
       </p:sp>
@@ -4962,7 +4998,7 @@
           <a:noFill/>
         </p:spPr>
         <p:txBody>
-          <a:bodyPr wrap="square" lIns="25400" rIns="25400" tIns="12700" bIns="12700">
+          <a:bodyPr wrap="square" lIns="25400" tIns="12700" rIns="25400" bIns="12700">
             <a:normAutofit/>
           </a:bodyPr>
           <a:lstStyle/>
@@ -5024,6 +5060,7 @@
           <a:lstStyle/>
           <a:p>
             <a:pPr algn="ctr"/>
+            <a:endParaRPr/>
           </a:p>
         </p:txBody>
       </p:sp>
@@ -5095,6 +5132,7 @@
           <a:lstStyle/>
           <a:p>
             <a:pPr algn="ctr"/>
+            <a:endParaRPr/>
           </a:p>
         </p:txBody>
       </p:sp>
@@ -5166,6 +5204,7 @@
           <a:lstStyle/>
           <a:p>
             <a:pPr algn="ctr"/>
+            <a:endParaRPr/>
           </a:p>
         </p:txBody>
       </p:sp>
@@ -5237,6 +5276,7 @@
           <a:lstStyle/>
           <a:p>
             <a:pPr algn="ctr"/>
+            <a:endParaRPr/>
           </a:p>
         </p:txBody>
       </p:sp>
@@ -5308,6 +5348,7 @@
           <a:lstStyle/>
           <a:p>
             <a:pPr algn="ctr"/>
+            <a:endParaRPr/>
           </a:p>
         </p:txBody>
       </p:sp>
@@ -5379,6 +5420,7 @@
           <a:lstStyle/>
           <a:p>
             <a:pPr algn="ctr"/>
+            <a:endParaRPr/>
           </a:p>
         </p:txBody>
       </p:sp>
@@ -5450,6 +5492,7 @@
           <a:lstStyle/>
           <a:p>
             <a:pPr algn="ctr"/>
+            <a:endParaRPr/>
           </a:p>
         </p:txBody>
       </p:sp>
@@ -5470,7 +5513,7 @@
           <a:noFill/>
         </p:spPr>
         <p:txBody>
-          <a:bodyPr wrap="square" lIns="25400" rIns="25400" tIns="12700" bIns="12700">
+          <a:bodyPr wrap="square" lIns="25400" tIns="12700" rIns="25400" bIns="12700">
             <a:normAutofit/>
           </a:bodyPr>
           <a:lstStyle/>
@@ -5505,7 +5548,7 @@
           <a:noFill/>
         </p:spPr>
         <p:txBody>
-          <a:bodyPr wrap="square" lIns="50800" rIns="50800" tIns="25400" bIns="25400">
+          <a:bodyPr wrap="square" lIns="50800" tIns="25400" rIns="50800" bIns="25400">
             <a:normAutofit/>
           </a:bodyPr>
           <a:lstStyle/>
@@ -5619,6 +5662,7 @@
           <a:lstStyle/>
           <a:p>
             <a:pPr algn="ctr"/>
+            <a:endParaRPr/>
           </a:p>
         </p:txBody>
       </p:sp>
@@ -5639,7 +5683,7 @@
           <a:noFill/>
         </p:spPr>
         <p:txBody>
-          <a:bodyPr wrap="square" lIns="25400" rIns="25400" tIns="12700" bIns="12700">
+          <a:bodyPr wrap="square" lIns="25400" tIns="12700" rIns="25400" bIns="12700">
             <a:normAutofit/>
           </a:bodyPr>
           <a:lstStyle/>
@@ -5674,7 +5718,7 @@
           <a:noFill/>
         </p:spPr>
         <p:txBody>
-          <a:bodyPr wrap="square" lIns="50800" rIns="50800" tIns="25400" bIns="25400">
+          <a:bodyPr wrap="square" lIns="50800" tIns="25400" rIns="50800" bIns="25400">
             <a:normAutofit/>
           </a:bodyPr>
           <a:lstStyle/>
@@ -5753,7 +5797,7 @@
 </file>
 
 <file path=ppt/slides/slide3.xml><?xml version="1.0" encoding="utf-8"?>
-<p:sld xmlns:a="http://schemas.openxmlformats.org/drawingml/2006/main" xmlns:p="http://schemas.openxmlformats.org/presentationml/2006/main" xmlns:r="http://schemas.openxmlformats.org/officeDocument/2006/relationships">
+<p:sld xmlns:a="http://schemas.openxmlformats.org/drawingml/2006/main" xmlns:r="http://schemas.openxmlformats.org/officeDocument/2006/relationships" xmlns:p="http://schemas.openxmlformats.org/presentationml/2006/main">
   <p:cSld>
     <p:bg>
       <p:bgPr>
@@ -5769,7 +5813,14 @@
         <p:cNvGrpSpPr/>
         <p:nvPr/>
       </p:nvGrpSpPr>
-      <p:grpSpPr/>
+      <p:grpSpPr>
+        <a:xfrm>
+          <a:off x="0" y="0"/>
+          <a:ext cx="0" cy="0"/>
+          <a:chOff x="0" y="0"/>
+          <a:chExt cx="0" cy="0"/>
+        </a:xfrm>
+      </p:grpSpPr>
       <p:pic>
         <p:nvPicPr>
           <p:cNvPr id="2" name="Picture 1" descr="fracto_logo.png"/>
@@ -5811,7 +5862,7 @@
           <a:noFill/>
         </p:spPr>
         <p:txBody>
-          <a:bodyPr wrap="square" lIns="25400" rIns="25400" tIns="12700" bIns="12700">
+          <a:bodyPr wrap="square" lIns="25400" tIns="12700" rIns="25400" bIns="12700">
             <a:normAutofit/>
           </a:bodyPr>
           <a:lstStyle/>
@@ -5846,7 +5897,7 @@
           <a:noFill/>
         </p:spPr>
         <p:txBody>
-          <a:bodyPr wrap="square" lIns="25400" rIns="25400" tIns="12700" bIns="12700">
+          <a:bodyPr wrap="square" lIns="25400" tIns="12700" rIns="25400" bIns="12700">
             <a:normAutofit/>
           </a:bodyPr>
           <a:lstStyle/>
@@ -5881,7 +5932,7 @@
           <a:noFill/>
         </p:spPr>
         <p:txBody>
-          <a:bodyPr wrap="square" lIns="25400" rIns="25400" tIns="12700" bIns="12700">
+          <a:bodyPr wrap="square" lIns="25400" tIns="12700" rIns="25400" bIns="12700">
             <a:normAutofit/>
           </a:bodyPr>
           <a:lstStyle/>
@@ -5941,6 +5992,7 @@
           <a:lstStyle/>
           <a:p>
             <a:pPr algn="ctr"/>
+            <a:endParaRPr/>
           </a:p>
         </p:txBody>
       </p:sp>
@@ -5961,7 +6013,7 @@
           <a:noFill/>
         </p:spPr>
         <p:txBody>
-          <a:bodyPr wrap="square" lIns="25400" rIns="25400" tIns="12700" bIns="12700">
+          <a:bodyPr wrap="square" lIns="25400" tIns="12700" rIns="25400" bIns="12700">
             <a:normAutofit/>
           </a:bodyPr>
           <a:lstStyle/>
@@ -5996,7 +6048,7 @@
           <a:noFill/>
         </p:spPr>
         <p:txBody>
-          <a:bodyPr wrap="square" lIns="25400" rIns="25400" tIns="12700" bIns="12700">
+          <a:bodyPr wrap="square" lIns="25400" tIns="12700" rIns="25400" bIns="12700">
             <a:normAutofit/>
           </a:bodyPr>
           <a:lstStyle/>
@@ -6022,29 +6074,65 @@
         </p:nvSpPr>
         <p:spPr>
           <a:xfrm>
-            <a:off x="658368" y="2359152"/>
-            <a:ext cx="5440680" cy="438912"/>
-          </a:xfrm>
-          <a:prstGeom prst="rect">
-            <a:avLst/>
-          </a:prstGeom>
-          <a:noFill/>
-        </p:spPr>
-        <p:txBody>
-          <a:bodyPr wrap="square" lIns="25400" rIns="25400" tIns="12700" bIns="12700">
+            <a:off x="658368" y="2048256"/>
+            <a:ext cx="5440680" cy="749808"/>
+          </a:xfrm>
+          <a:prstGeom prst="rect">
+            <a:avLst/>
+          </a:prstGeom>
+          <a:noFill/>
+        </p:spPr>
+        <p:txBody>
+          <a:bodyPr wrap="square" lIns="25400" tIns="12700" rIns="25400" bIns="12700" anchor="b">
             <a:normAutofit/>
           </a:bodyPr>
           <a:lstStyle/>
           <a:p>
             <a:pPr algn="l"/>
             <a:r>
-              <a:rPr sz="1060" b="0">
+              <a:rPr sz="1060" b="0" dirty="0">
                 <a:solidFill>
                   <a:srgbClr val="324463"/>
                 </a:solidFill>
                 <a:latin typeface="IBM Plex Sans"/>
               </a:rPr>
-              <a:t>For {{lead_company_name}}, {{pain_point_1}}, {{pain_point_2}}, and {{pain_point_3}} can slow down {{primary_workflow}}.</a:t>
+              <a:t>For {{</a:t>
+            </a:r>
+            <a:r>
+              <a:rPr sz="1060" b="0" dirty="0" err="1">
+                <a:solidFill>
+                  <a:srgbClr val="324463"/>
+                </a:solidFill>
+                <a:latin typeface="IBM Plex Sans"/>
+              </a:rPr>
+              <a:t>lead_company_name</a:t>
+            </a:r>
+            <a:r>
+              <a:rPr sz="1060" b="0" dirty="0">
+                <a:solidFill>
+                  <a:srgbClr val="324463"/>
+                </a:solidFill>
+                <a:latin typeface="IBM Plex Sans"/>
+              </a:rPr>
+              <a:t>}}, {{pain_point_1}} can slow down {{</a:t>
+            </a:r>
+            <a:r>
+              <a:rPr sz="1060" b="0" dirty="0" err="1">
+                <a:solidFill>
+                  <a:srgbClr val="324463"/>
+                </a:solidFill>
+                <a:latin typeface="IBM Plex Sans"/>
+              </a:rPr>
+              <a:t>primary_workflow</a:t>
+            </a:r>
+            <a:r>
+              <a:rPr sz="1060" b="0" dirty="0">
+                <a:solidFill>
+                  <a:srgbClr val="324463"/>
+                </a:solidFill>
+                <a:latin typeface="IBM Plex Sans"/>
+              </a:rPr>
+              <a:t>}}.</a:t>
             </a:r>
           </a:p>
         </p:txBody>
@@ -6093,6 +6181,7 @@
           <a:lstStyle/>
           <a:p>
             <a:pPr algn="ctr"/>
+            <a:endParaRPr/>
           </a:p>
         </p:txBody>
       </p:sp>
@@ -6138,6 +6227,7 @@
           <a:lstStyle/>
           <a:p>
             <a:pPr algn="ctr"/>
+            <a:endParaRPr/>
           </a:p>
         </p:txBody>
       </p:sp>
@@ -6158,7 +6248,7 @@
           <a:noFill/>
         </p:spPr>
         <p:txBody>
-          <a:bodyPr wrap="square" lIns="25400" rIns="25400" tIns="12700" bIns="12700">
+          <a:bodyPr wrap="square" lIns="25400" tIns="12700" rIns="25400" bIns="12700">
             <a:normAutofit/>
           </a:bodyPr>
           <a:lstStyle/>
@@ -6193,7 +6283,7 @@
           <a:noFill/>
         </p:spPr>
         <p:txBody>
-          <a:bodyPr wrap="square" lIns="25400" rIns="25400" tIns="12700" bIns="12700">
+          <a:bodyPr wrap="square" lIns="25400" tIns="12700" rIns="25400" bIns="12700">
             <a:normAutofit/>
           </a:bodyPr>
           <a:lstStyle/>
@@ -6228,7 +6318,7 @@
           <a:noFill/>
         </p:spPr>
         <p:txBody>
-          <a:bodyPr wrap="square" lIns="25400" rIns="25400" tIns="12700" bIns="12700">
+          <a:bodyPr wrap="square" lIns="25400" tIns="12700" rIns="25400" bIns="12700">
             <a:normAutofit/>
           </a:bodyPr>
           <a:lstStyle/>
@@ -6290,6 +6380,7 @@
           <a:lstStyle/>
           <a:p>
             <a:pPr algn="ctr"/>
+            <a:endParaRPr/>
           </a:p>
         </p:txBody>
       </p:sp>
@@ -6335,6 +6426,7 @@
           <a:lstStyle/>
           <a:p>
             <a:pPr algn="ctr"/>
+            <a:endParaRPr/>
           </a:p>
         </p:txBody>
       </p:sp>
@@ -6355,7 +6447,7 @@
           <a:noFill/>
         </p:spPr>
         <p:txBody>
-          <a:bodyPr wrap="square" lIns="25400" rIns="25400" tIns="12700" bIns="12700">
+          <a:bodyPr wrap="square" lIns="25400" tIns="12700" rIns="25400" bIns="12700">
             <a:normAutofit/>
           </a:bodyPr>
           <a:lstStyle/>
@@ -6390,7 +6482,7 @@
           <a:noFill/>
         </p:spPr>
         <p:txBody>
-          <a:bodyPr wrap="square" lIns="25400" rIns="25400" tIns="12700" bIns="12700">
+          <a:bodyPr wrap="square" lIns="25400" tIns="12700" rIns="25400" bIns="12700">
             <a:normAutofit/>
           </a:bodyPr>
           <a:lstStyle/>
@@ -6425,7 +6517,7 @@
           <a:noFill/>
         </p:spPr>
         <p:txBody>
-          <a:bodyPr wrap="square" lIns="25400" rIns="25400" tIns="12700" bIns="12700">
+          <a:bodyPr wrap="square" lIns="25400" tIns="12700" rIns="25400" bIns="12700">
             <a:normAutofit/>
           </a:bodyPr>
           <a:lstStyle/>
@@ -6487,6 +6579,7 @@
           <a:lstStyle/>
           <a:p>
             <a:pPr algn="ctr"/>
+            <a:endParaRPr/>
           </a:p>
         </p:txBody>
       </p:sp>
@@ -6532,6 +6625,7 @@
           <a:lstStyle/>
           <a:p>
             <a:pPr algn="ctr"/>
+            <a:endParaRPr/>
           </a:p>
         </p:txBody>
       </p:sp>
@@ -6552,7 +6646,7 @@
           <a:noFill/>
         </p:spPr>
         <p:txBody>
-          <a:bodyPr wrap="square" lIns="25400" rIns="25400" tIns="12700" bIns="12700">
+          <a:bodyPr wrap="square" lIns="25400" tIns="12700" rIns="25400" bIns="12700">
             <a:normAutofit/>
           </a:bodyPr>
           <a:lstStyle/>
@@ -6587,7 +6681,7 @@
           <a:noFill/>
         </p:spPr>
         <p:txBody>
-          <a:bodyPr wrap="square" lIns="25400" rIns="25400" tIns="12700" bIns="12700">
+          <a:bodyPr wrap="square" lIns="25400" tIns="12700" rIns="25400" bIns="12700">
             <a:normAutofit/>
           </a:bodyPr>
           <a:lstStyle/>
@@ -6622,7 +6716,7 @@
           <a:noFill/>
         </p:spPr>
         <p:txBody>
-          <a:bodyPr wrap="square" lIns="25400" rIns="25400" tIns="12700" bIns="12700">
+          <a:bodyPr wrap="square" lIns="25400" tIns="12700" rIns="25400" bIns="12700">
             <a:normAutofit/>
           </a:bodyPr>
           <a:lstStyle/>
@@ -6684,6 +6778,7 @@
           <a:lstStyle/>
           <a:p>
             <a:pPr algn="ctr"/>
+            <a:endParaRPr/>
           </a:p>
         </p:txBody>
       </p:sp>
@@ -6729,6 +6824,7 @@
           <a:lstStyle/>
           <a:p>
             <a:pPr algn="ctr"/>
+            <a:endParaRPr/>
           </a:p>
         </p:txBody>
       </p:sp>
@@ -6749,7 +6845,7 @@
           <a:noFill/>
         </p:spPr>
         <p:txBody>
-          <a:bodyPr wrap="square" lIns="25400" rIns="25400" tIns="12700" bIns="12700">
+          <a:bodyPr wrap="square" lIns="25400" tIns="12700" rIns="25400" bIns="12700">
             <a:normAutofit/>
           </a:bodyPr>
           <a:lstStyle/>
@@ -6784,7 +6880,7 @@
           <a:noFill/>
         </p:spPr>
         <p:txBody>
-          <a:bodyPr wrap="square" lIns="25400" rIns="25400" tIns="12700" bIns="12700">
+          <a:bodyPr wrap="square" lIns="25400" tIns="12700" rIns="25400" bIns="12700">
             <a:normAutofit/>
           </a:bodyPr>
           <a:lstStyle/>
@@ -6819,7 +6915,7 @@
           <a:noFill/>
         </p:spPr>
         <p:txBody>
-          <a:bodyPr wrap="square" lIns="25400" rIns="25400" tIns="12700" bIns="12700">
+          <a:bodyPr wrap="square" lIns="25400" tIns="12700" rIns="25400" bIns="12700">
             <a:normAutofit/>
           </a:bodyPr>
           <a:lstStyle/>
@@ -6846,7 +6942,7 @@
         <p:spPr>
           <a:xfrm>
             <a:off x="6263640" y="1389888"/>
-            <a:ext cx="3611880" cy="2011680"/>
+            <a:ext cx="3611880" cy="2139696"/>
           </a:xfrm>
           <a:prstGeom prst="roundRect">
             <a:avLst>
@@ -6881,6 +6977,7 @@
           <a:lstStyle/>
           <a:p>
             <a:pPr algn="ctr"/>
+            <a:endParaRPr/>
           </a:p>
         </p:txBody>
       </p:sp>
@@ -6901,7 +6998,7 @@
           <a:noFill/>
         </p:spPr>
         <p:txBody>
-          <a:bodyPr wrap="square" lIns="25400" rIns="25400" tIns="12700" bIns="12700">
+          <a:bodyPr wrap="square" lIns="25400" tIns="12700" rIns="25400" bIns="12700">
             <a:normAutofit/>
           </a:bodyPr>
           <a:lstStyle/>
@@ -6936,7 +7033,7 @@
           <a:noFill/>
         </p:spPr>
         <p:txBody>
-          <a:bodyPr wrap="square" lIns="50800" rIns="50800" tIns="25400" bIns="25400">
+          <a:bodyPr wrap="square" lIns="50800" tIns="25400" rIns="50800" bIns="25400">
             <a:normAutofit/>
           </a:bodyPr>
           <a:lstStyle/>
@@ -6947,7 +7044,7 @@
               </a:spcAft>
             </a:pPr>
             <a:r>
-              <a:rPr sz="960" b="0">
+              <a:rPr sz="960" b="0" dirty="0">
                 <a:solidFill>
                   <a:srgbClr val="324463"/>
                 </a:solidFill>
@@ -6963,7 +7060,7 @@
               </a:spcAft>
             </a:pPr>
             <a:r>
-              <a:rPr sz="960" b="0">
+              <a:rPr sz="960" b="0" dirty="0">
                 <a:solidFill>
                   <a:srgbClr val="324463"/>
                 </a:solidFill>
@@ -6979,7 +7076,7 @@
               </a:spcAft>
             </a:pPr>
             <a:r>
-              <a:rPr sz="960" b="0">
+              <a:rPr sz="960" b="0" dirty="0">
                 <a:solidFill>
                   <a:srgbClr val="324463"/>
                 </a:solidFill>
@@ -6995,7 +7092,7 @@
               </a:spcAft>
             </a:pPr>
             <a:r>
-              <a:rPr sz="960" b="0">
+              <a:rPr sz="960" b="0" dirty="0">
                 <a:solidFill>
                   <a:srgbClr val="324463"/>
                 </a:solidFill>
@@ -7050,6 +7147,7 @@
           <a:lstStyle/>
           <a:p>
             <a:pPr algn="ctr"/>
+            <a:endParaRPr/>
           </a:p>
         </p:txBody>
       </p:sp>
@@ -7070,7 +7168,7 @@
           <a:noFill/>
         </p:spPr>
         <p:txBody>
-          <a:bodyPr wrap="square" lIns="25400" rIns="25400" tIns="12700" bIns="12700">
+          <a:bodyPr wrap="square" lIns="25400" tIns="12700" rIns="25400" bIns="12700">
             <a:normAutofit/>
           </a:bodyPr>
           <a:lstStyle/>
@@ -7105,7 +7203,7 @@
           <a:noFill/>
         </p:spPr>
         <p:txBody>
-          <a:bodyPr wrap="square" lIns="50800" rIns="50800" tIns="25400" bIns="25400">
+          <a:bodyPr wrap="square" lIns="50800" tIns="25400" rIns="50800" bIns="25400">
             <a:normAutofit/>
           </a:bodyPr>
           <a:lstStyle/>
@@ -7184,7 +7282,7 @@
 </file>
 
 <file path=ppt/slides/slide4.xml><?xml version="1.0" encoding="utf-8"?>
-<p:sld xmlns:a="http://schemas.openxmlformats.org/drawingml/2006/main" xmlns:p="http://schemas.openxmlformats.org/presentationml/2006/main" xmlns:r="http://schemas.openxmlformats.org/officeDocument/2006/relationships">
+<p:sld xmlns:a="http://schemas.openxmlformats.org/drawingml/2006/main" xmlns:r="http://schemas.openxmlformats.org/officeDocument/2006/relationships" xmlns:p="http://schemas.openxmlformats.org/presentationml/2006/main">
   <p:cSld>
     <p:bg>
       <p:bgPr>
@@ -7200,7 +7298,14 @@
         <p:cNvGrpSpPr/>
         <p:nvPr/>
       </p:nvGrpSpPr>
-      <p:grpSpPr/>
+      <p:grpSpPr>
+        <a:xfrm>
+          <a:off x="0" y="0"/>
+          <a:ext cx="0" cy="0"/>
+          <a:chOff x="0" y="0"/>
+          <a:chExt cx="0" cy="0"/>
+        </a:xfrm>
+      </p:grpSpPr>
       <p:pic>
         <p:nvPicPr>
           <p:cNvPr id="2" name="Picture 1" descr="fracto_logo.png"/>
@@ -7242,7 +7347,7 @@
           <a:noFill/>
         </p:spPr>
         <p:txBody>
-          <a:bodyPr wrap="square" lIns="25400" rIns="25400" tIns="12700" bIns="12700">
+          <a:bodyPr wrap="square" lIns="25400" tIns="12700" rIns="25400" bIns="12700">
             <a:normAutofit/>
           </a:bodyPr>
           <a:lstStyle/>
@@ -7277,7 +7382,7 @@
           <a:noFill/>
         </p:spPr>
         <p:txBody>
-          <a:bodyPr wrap="square" lIns="25400" rIns="25400" tIns="12700" bIns="12700">
+          <a:bodyPr wrap="square" lIns="25400" tIns="12700" rIns="25400" bIns="12700">
             <a:normAutofit/>
           </a:bodyPr>
           <a:lstStyle/>
@@ -7312,7 +7417,7 @@
           <a:noFill/>
         </p:spPr>
         <p:txBody>
-          <a:bodyPr wrap="square" lIns="25400" rIns="25400" tIns="12700" bIns="12700">
+          <a:bodyPr wrap="square" lIns="25400" tIns="12700" rIns="25400" bIns="12700">
             <a:normAutofit/>
           </a:bodyPr>
           <a:lstStyle/>
@@ -7372,6 +7477,7 @@
           <a:lstStyle/>
           <a:p>
             <a:pPr algn="ctr"/>
+            <a:endParaRPr/>
           </a:p>
         </p:txBody>
       </p:sp>
@@ -7392,7 +7498,7 @@
           <a:noFill/>
         </p:spPr>
         <p:txBody>
-          <a:bodyPr wrap="square" lIns="25400" rIns="25400" tIns="12700" bIns="12700">
+          <a:bodyPr wrap="square" lIns="25400" tIns="12700" rIns="25400" bIns="12700">
             <a:normAutofit/>
           </a:bodyPr>
           <a:lstStyle/>
@@ -7427,7 +7533,7 @@
           <a:noFill/>
         </p:spPr>
         <p:txBody>
-          <a:bodyPr wrap="square" lIns="25400" rIns="25400" tIns="12700" bIns="12700">
+          <a:bodyPr wrap="square" lIns="25400" tIns="12700" rIns="25400" bIns="12700">
             <a:normAutofit/>
           </a:bodyPr>
           <a:lstStyle/>
@@ -7462,7 +7568,7 @@
           <a:noFill/>
         </p:spPr>
         <p:txBody>
-          <a:bodyPr wrap="square" lIns="25400" rIns="25400" tIns="12700" bIns="12700">
+          <a:bodyPr wrap="square" lIns="25400" tIns="12700" rIns="25400" bIns="12700">
             <a:normAutofit/>
           </a:bodyPr>
           <a:lstStyle/>
@@ -7524,6 +7630,7 @@
           <a:lstStyle/>
           <a:p>
             <a:pPr algn="ctr"/>
+            <a:endParaRPr/>
           </a:p>
         </p:txBody>
       </p:sp>
@@ -7544,7 +7651,7 @@
           <a:noFill/>
         </p:spPr>
         <p:txBody>
-          <a:bodyPr wrap="square" lIns="25400" rIns="25400" tIns="12700" bIns="12700">
+          <a:bodyPr wrap="square" lIns="25400" tIns="12700" rIns="25400" bIns="12700">
             <a:normAutofit/>
           </a:bodyPr>
           <a:lstStyle/>
@@ -7606,6 +7713,7 @@
           <a:lstStyle/>
           <a:p>
             <a:pPr algn="ctr"/>
+            <a:endParaRPr/>
           </a:p>
         </p:txBody>
       </p:sp>
@@ -7651,6 +7759,7 @@
           <a:lstStyle/>
           <a:p>
             <a:pPr algn="ctr"/>
+            <a:endParaRPr/>
           </a:p>
         </p:txBody>
       </p:sp>
@@ -7671,7 +7780,7 @@
           <a:noFill/>
         </p:spPr>
         <p:txBody>
-          <a:bodyPr wrap="square" lIns="25400" rIns="25400" tIns="12700" bIns="12700">
+          <a:bodyPr wrap="square" lIns="25400" tIns="12700" rIns="25400" bIns="12700">
             <a:normAutofit/>
           </a:bodyPr>
           <a:lstStyle/>
@@ -7706,7 +7815,7 @@
           <a:noFill/>
         </p:spPr>
         <p:txBody>
-          <a:bodyPr wrap="square" lIns="25400" rIns="25400" tIns="12700" bIns="12700">
+          <a:bodyPr wrap="square" lIns="25400" tIns="12700" rIns="25400" bIns="12700">
             <a:normAutofit/>
           </a:bodyPr>
           <a:lstStyle/>
@@ -7741,7 +7850,7 @@
           <a:noFill/>
         </p:spPr>
         <p:txBody>
-          <a:bodyPr wrap="square" lIns="25400" rIns="25400" tIns="12700" bIns="12700">
+          <a:bodyPr wrap="square" lIns="25400" tIns="12700" rIns="25400" bIns="12700">
             <a:normAutofit/>
           </a:bodyPr>
           <a:lstStyle/>
@@ -7776,7 +7885,7 @@
           <a:noFill/>
         </p:spPr>
         <p:txBody>
-          <a:bodyPr wrap="square" lIns="25400" rIns="25400" tIns="12700" bIns="12700">
+          <a:bodyPr wrap="square" lIns="25400" tIns="12700" rIns="25400" bIns="12700">
             <a:normAutofit/>
           </a:bodyPr>
           <a:lstStyle/>
@@ -7811,7 +7920,7 @@
           <a:noFill/>
         </p:spPr>
         <p:txBody>
-          <a:bodyPr wrap="square" lIns="25400" rIns="25400" tIns="12700" bIns="12700">
+          <a:bodyPr wrap="square" lIns="25400" tIns="12700" rIns="25400" bIns="12700">
             <a:normAutofit/>
           </a:bodyPr>
           <a:lstStyle/>
@@ -7846,7 +7955,7 @@
           <a:noFill/>
         </p:spPr>
         <p:txBody>
-          <a:bodyPr wrap="square" lIns="25400" rIns="25400" tIns="12700" bIns="12700">
+          <a:bodyPr wrap="square" lIns="25400" tIns="12700" rIns="25400" bIns="12700">
             <a:normAutofit/>
           </a:bodyPr>
           <a:lstStyle/>
@@ -7881,7 +7990,7 @@
           <a:noFill/>
         </p:spPr>
         <p:txBody>
-          <a:bodyPr wrap="square" lIns="25400" rIns="25400" tIns="12700" bIns="12700">
+          <a:bodyPr wrap="square" lIns="25400" tIns="12700" rIns="25400" bIns="12700">
             <a:normAutofit/>
           </a:bodyPr>
           <a:lstStyle/>
@@ -7916,7 +8025,7 @@
           <a:noFill/>
         </p:spPr>
         <p:txBody>
-          <a:bodyPr wrap="square" lIns="25400" rIns="25400" tIns="12700" bIns="12700">
+          <a:bodyPr wrap="square" lIns="25400" tIns="12700" rIns="25400" bIns="12700">
             <a:normAutofit/>
           </a:bodyPr>
           <a:lstStyle/>
@@ -7951,7 +8060,7 @@
           <a:noFill/>
         </p:spPr>
         <p:txBody>
-          <a:bodyPr wrap="square" lIns="25400" rIns="25400" tIns="12700" bIns="12700">
+          <a:bodyPr wrap="square" lIns="25400" tIns="12700" rIns="25400" bIns="12700">
             <a:normAutofit/>
           </a:bodyPr>
           <a:lstStyle/>
@@ -7986,7 +8095,7 @@
           <a:noFill/>
         </p:spPr>
         <p:txBody>
-          <a:bodyPr wrap="square" lIns="25400" rIns="25400" tIns="12700" bIns="12700">
+          <a:bodyPr wrap="square" lIns="25400" tIns="12700" rIns="25400" bIns="12700">
             <a:normAutofit/>
           </a:bodyPr>
           <a:lstStyle/>
@@ -8021,7 +8130,7 @@
           <a:noFill/>
         </p:spPr>
         <p:txBody>
-          <a:bodyPr wrap="square" lIns="25400" rIns="25400" tIns="12700" bIns="12700">
+          <a:bodyPr wrap="square" lIns="25400" tIns="12700" rIns="25400" bIns="12700">
             <a:normAutofit/>
           </a:bodyPr>
           <a:lstStyle/>
@@ -8083,6 +8192,7 @@
           <a:lstStyle/>
           <a:p>
             <a:pPr algn="ctr"/>
+            <a:endParaRPr/>
           </a:p>
         </p:txBody>
       </p:sp>
@@ -8128,6 +8238,7 @@
           <a:lstStyle/>
           <a:p>
             <a:pPr algn="ctr"/>
+            <a:endParaRPr/>
           </a:p>
         </p:txBody>
       </p:sp>
@@ -8148,7 +8259,7 @@
           <a:noFill/>
         </p:spPr>
         <p:txBody>
-          <a:bodyPr wrap="square" lIns="25400" rIns="25400" tIns="12700" bIns="12700">
+          <a:bodyPr wrap="square" lIns="25400" tIns="12700" rIns="25400" bIns="12700">
             <a:normAutofit/>
           </a:bodyPr>
           <a:lstStyle/>
@@ -8183,7 +8294,7 @@
           <a:noFill/>
         </p:spPr>
         <p:txBody>
-          <a:bodyPr wrap="square" lIns="25400" rIns="25400" tIns="12700" bIns="12700">
+          <a:bodyPr wrap="square" lIns="25400" tIns="12700" rIns="25400" bIns="12700">
             <a:normAutofit/>
           </a:bodyPr>
           <a:lstStyle/>
@@ -8218,7 +8329,7 @@
           <a:noFill/>
         </p:spPr>
         <p:txBody>
-          <a:bodyPr wrap="square" lIns="25400" rIns="25400" tIns="12700" bIns="12700">
+          <a:bodyPr wrap="square" lIns="25400" tIns="12700" rIns="25400" bIns="12700">
             <a:normAutofit/>
           </a:bodyPr>
           <a:lstStyle/>
@@ -8253,7 +8364,7 @@
           <a:noFill/>
         </p:spPr>
         <p:txBody>
-          <a:bodyPr wrap="square" lIns="25400" rIns="25400" tIns="12700" bIns="12700">
+          <a:bodyPr wrap="square" lIns="25400" tIns="12700" rIns="25400" bIns="12700">
             <a:normAutofit/>
           </a:bodyPr>
           <a:lstStyle/>
@@ -8288,7 +8399,7 @@
           <a:noFill/>
         </p:spPr>
         <p:txBody>
-          <a:bodyPr wrap="square" lIns="25400" rIns="25400" tIns="12700" bIns="12700">
+          <a:bodyPr wrap="square" lIns="25400" tIns="12700" rIns="25400" bIns="12700">
             <a:normAutofit/>
           </a:bodyPr>
           <a:lstStyle/>
@@ -8323,7 +8434,7 @@
           <a:noFill/>
         </p:spPr>
         <p:txBody>
-          <a:bodyPr wrap="square" lIns="25400" rIns="25400" tIns="12700" bIns="12700">
+          <a:bodyPr wrap="square" lIns="25400" tIns="12700" rIns="25400" bIns="12700">
             <a:normAutofit/>
           </a:bodyPr>
           <a:lstStyle/>
@@ -8358,7 +8469,7 @@
           <a:noFill/>
         </p:spPr>
         <p:txBody>
-          <a:bodyPr wrap="square" lIns="25400" rIns="25400" tIns="12700" bIns="12700">
+          <a:bodyPr wrap="square" lIns="25400" tIns="12700" rIns="25400" bIns="12700">
             <a:normAutofit/>
           </a:bodyPr>
           <a:lstStyle/>
@@ -8393,7 +8504,7 @@
           <a:noFill/>
         </p:spPr>
         <p:txBody>
-          <a:bodyPr wrap="square" lIns="25400" rIns="25400" tIns="12700" bIns="12700">
+          <a:bodyPr wrap="square" lIns="25400" tIns="12700" rIns="25400" bIns="12700">
             <a:normAutofit/>
           </a:bodyPr>
           <a:lstStyle/>
@@ -8428,7 +8539,7 @@
           <a:noFill/>
         </p:spPr>
         <p:txBody>
-          <a:bodyPr wrap="square" lIns="25400" rIns="25400" tIns="12700" bIns="12700">
+          <a:bodyPr wrap="square" lIns="25400" tIns="12700" rIns="25400" bIns="12700">
             <a:normAutofit/>
           </a:bodyPr>
           <a:lstStyle/>
@@ -8463,7 +8574,7 @@
           <a:noFill/>
         </p:spPr>
         <p:txBody>
-          <a:bodyPr wrap="square" lIns="25400" rIns="25400" tIns="12700" bIns="12700">
+          <a:bodyPr wrap="square" lIns="25400" tIns="12700" rIns="25400" bIns="12700">
             <a:normAutofit/>
           </a:bodyPr>
           <a:lstStyle/>
@@ -8498,7 +8609,7 @@
           <a:noFill/>
         </p:spPr>
         <p:txBody>
-          <a:bodyPr wrap="square" lIns="25400" rIns="25400" tIns="12700" bIns="12700">
+          <a:bodyPr wrap="square" lIns="25400" tIns="12700" rIns="25400" bIns="12700">
             <a:normAutofit/>
           </a:bodyPr>
           <a:lstStyle/>
@@ -8560,6 +8671,7 @@
           <a:lstStyle/>
           <a:p>
             <a:pPr algn="ctr"/>
+            <a:endParaRPr/>
           </a:p>
         </p:txBody>
       </p:sp>
@@ -8580,7 +8692,7 @@
           <a:noFill/>
         </p:spPr>
         <p:txBody>
-          <a:bodyPr wrap="square" lIns="25400" rIns="25400" tIns="12700" bIns="12700">
+          <a:bodyPr wrap="square" lIns="25400" tIns="12700" rIns="25400" bIns="12700">
             <a:normAutofit/>
           </a:bodyPr>
           <a:lstStyle/>
@@ -8615,7 +8727,7 @@
           <a:noFill/>
         </p:spPr>
         <p:txBody>
-          <a:bodyPr wrap="square" lIns="25400" rIns="25400" tIns="12700" bIns="12700">
+          <a:bodyPr wrap="square" lIns="25400" tIns="12700" rIns="25400" bIns="12700">
             <a:normAutofit/>
           </a:bodyPr>
           <a:lstStyle/>
@@ -8677,6 +8789,7 @@
           <a:lstStyle/>
           <a:p>
             <a:pPr algn="ctr"/>
+            <a:endParaRPr/>
           </a:p>
         </p:txBody>
       </p:sp>
@@ -8697,7 +8810,7 @@
           <a:noFill/>
         </p:spPr>
         <p:txBody>
-          <a:bodyPr wrap="square" lIns="25400" rIns="25400" tIns="12700" bIns="12700">
+          <a:bodyPr wrap="square" lIns="25400" tIns="12700" rIns="25400" bIns="12700">
             <a:normAutofit/>
           </a:bodyPr>
           <a:lstStyle/>
@@ -8732,7 +8845,7 @@
           <a:noFill/>
         </p:spPr>
         <p:txBody>
-          <a:bodyPr wrap="square" lIns="50800" rIns="50800" tIns="25400" bIns="25400">
+          <a:bodyPr wrap="square" lIns="50800" tIns="25400" rIns="50800" bIns="25400">
             <a:normAutofit/>
           </a:bodyPr>
           <a:lstStyle/>
@@ -8862,6 +8975,7 @@
           <a:lstStyle/>
           <a:p>
             <a:pPr algn="ctr"/>
+            <a:endParaRPr/>
           </a:p>
         </p:txBody>
       </p:sp>
@@ -8882,7 +8996,7 @@
           <a:noFill/>
         </p:spPr>
         <p:txBody>
-          <a:bodyPr wrap="square" lIns="25400" rIns="25400" tIns="12700" bIns="12700">
+          <a:bodyPr wrap="square" lIns="25400" tIns="12700" rIns="25400" bIns="12700">
             <a:normAutofit/>
           </a:bodyPr>
           <a:lstStyle/>
@@ -8917,7 +9031,7 @@
           <a:noFill/>
         </p:spPr>
         <p:txBody>
-          <a:bodyPr wrap="square" lIns="50800" rIns="50800" tIns="25400" bIns="25400">
+          <a:bodyPr wrap="square" lIns="50800" tIns="25400" rIns="50800" bIns="25400">
             <a:normAutofit/>
           </a:bodyPr>
           <a:lstStyle/>
@@ -9047,6 +9161,7 @@
           <a:lstStyle/>
           <a:p>
             <a:pPr algn="ctr"/>
+            <a:endParaRPr/>
           </a:p>
         </p:txBody>
       </p:sp>
@@ -9067,7 +9182,7 @@
           <a:noFill/>
         </p:spPr>
         <p:txBody>
-          <a:bodyPr wrap="square" lIns="25400" rIns="25400" tIns="12700" bIns="12700">
+          <a:bodyPr wrap="square" lIns="25400" tIns="12700" rIns="25400" bIns="12700">
             <a:normAutofit/>
           </a:bodyPr>
           <a:lstStyle/>
@@ -9102,7 +9217,7 @@
           <a:noFill/>
         </p:spPr>
         <p:txBody>
-          <a:bodyPr wrap="square" lIns="50800" rIns="50800" tIns="25400" bIns="25400">
+          <a:bodyPr wrap="square" lIns="50800" tIns="25400" rIns="50800" bIns="25400">
             <a:normAutofit/>
           </a:bodyPr>
           <a:lstStyle/>
@@ -9216,6 +9331,7 @@
           <a:lstStyle/>
           <a:p>
             <a:pPr algn="ctr"/>
+            <a:endParaRPr/>
           </a:p>
         </p:txBody>
       </p:sp>
@@ -9236,7 +9352,7 @@
           <a:noFill/>
         </p:spPr>
         <p:txBody>
-          <a:bodyPr wrap="square" lIns="25400" rIns="25400" tIns="12700" bIns="12700">
+          <a:bodyPr wrap="square" lIns="25400" tIns="12700" rIns="25400" bIns="12700">
             <a:normAutofit/>
           </a:bodyPr>
           <a:lstStyle/>
@@ -9271,7 +9387,7 @@
           <a:noFill/>
         </p:spPr>
         <p:txBody>
-          <a:bodyPr wrap="square" lIns="50800" rIns="50800" tIns="25400" bIns="25400">
+          <a:bodyPr wrap="square" lIns="50800" tIns="25400" rIns="50800" bIns="25400">
             <a:normAutofit/>
           </a:bodyPr>
           <a:lstStyle/>
@@ -9350,7 +9466,7 @@
 </file>
 
 <file path=ppt/slides/slide5.xml><?xml version="1.0" encoding="utf-8"?>
-<p:sld xmlns:a="http://schemas.openxmlformats.org/drawingml/2006/main" xmlns:p="http://schemas.openxmlformats.org/presentationml/2006/main" xmlns:r="http://schemas.openxmlformats.org/officeDocument/2006/relationships">
+<p:sld xmlns:a="http://schemas.openxmlformats.org/drawingml/2006/main" xmlns:r="http://schemas.openxmlformats.org/officeDocument/2006/relationships" xmlns:p="http://schemas.openxmlformats.org/presentationml/2006/main">
   <p:cSld>
     <p:bg>
       <p:bgPr>
@@ -9366,7 +9482,14 @@
         <p:cNvGrpSpPr/>
         <p:nvPr/>
       </p:nvGrpSpPr>
-      <p:grpSpPr/>
+      <p:grpSpPr>
+        <a:xfrm>
+          <a:off x="0" y="0"/>
+          <a:ext cx="0" cy="0"/>
+          <a:chOff x="0" y="0"/>
+          <a:chExt cx="0" cy="0"/>
+        </a:xfrm>
+      </p:grpSpPr>
       <p:pic>
         <p:nvPicPr>
           <p:cNvPr id="2" name="Picture 1" descr="fracto_logo.png"/>
@@ -9408,7 +9531,7 @@
           <a:noFill/>
         </p:spPr>
         <p:txBody>
-          <a:bodyPr wrap="square" lIns="25400" rIns="25400" tIns="12700" bIns="12700">
+          <a:bodyPr wrap="square" lIns="25400" tIns="12700" rIns="25400" bIns="12700">
             <a:normAutofit/>
           </a:bodyPr>
           <a:lstStyle/>
@@ -9443,7 +9566,7 @@
           <a:noFill/>
         </p:spPr>
         <p:txBody>
-          <a:bodyPr wrap="square" lIns="25400" rIns="25400" tIns="12700" bIns="12700">
+          <a:bodyPr wrap="square" lIns="25400" tIns="12700" rIns="25400" bIns="12700">
             <a:normAutofit/>
           </a:bodyPr>
           <a:lstStyle/>
@@ -9478,7 +9601,7 @@
           <a:noFill/>
         </p:spPr>
         <p:txBody>
-          <a:bodyPr wrap="square" lIns="25400" rIns="25400" tIns="12700" bIns="12700">
+          <a:bodyPr wrap="square" lIns="25400" tIns="12700" rIns="25400" bIns="12700">
             <a:normAutofit/>
           </a:bodyPr>
           <a:lstStyle/>
@@ -9538,6 +9661,7 @@
           <a:lstStyle/>
           <a:p>
             <a:pPr algn="ctr"/>
+            <a:endParaRPr/>
           </a:p>
         </p:txBody>
       </p:sp>
@@ -9558,7 +9682,7 @@
           <a:noFill/>
         </p:spPr>
         <p:txBody>
-          <a:bodyPr wrap="square" lIns="25400" rIns="25400" tIns="12700" bIns="12700">
+          <a:bodyPr wrap="square" lIns="25400" tIns="12700" rIns="25400" bIns="12700">
             <a:normAutofit/>
           </a:bodyPr>
           <a:lstStyle/>
@@ -9593,7 +9717,7 @@
           <a:noFill/>
         </p:spPr>
         <p:txBody>
-          <a:bodyPr wrap="square" lIns="25400" rIns="25400" tIns="12700" bIns="12700">
+          <a:bodyPr wrap="square" lIns="25400" tIns="12700" rIns="25400" bIns="12700">
             <a:normAutofit/>
           </a:bodyPr>
           <a:lstStyle/>
@@ -9628,7 +9752,7 @@
           <a:noFill/>
         </p:spPr>
         <p:txBody>
-          <a:bodyPr wrap="square" lIns="25400" rIns="25400" tIns="12700" bIns="12700">
+          <a:bodyPr wrap="square" lIns="25400" tIns="12700" rIns="25400" bIns="12700">
             <a:normAutofit/>
           </a:bodyPr>
           <a:lstStyle/>
@@ -9690,6 +9814,7 @@
           <a:lstStyle/>
           <a:p>
             <a:pPr algn="ctr"/>
+            <a:endParaRPr/>
           </a:p>
         </p:txBody>
       </p:sp>
@@ -9710,7 +9835,7 @@
           <a:noFill/>
         </p:spPr>
         <p:txBody>
-          <a:bodyPr wrap="square" lIns="25400" rIns="25400" tIns="12700" bIns="12700">
+          <a:bodyPr wrap="square" lIns="25400" tIns="12700" rIns="25400" bIns="12700">
             <a:normAutofit/>
           </a:bodyPr>
           <a:lstStyle/>
@@ -9769,7 +9894,7 @@
           <a:noFill/>
         </p:spPr>
         <p:txBody>
-          <a:bodyPr wrap="square" lIns="25400" rIns="25400" tIns="12700" bIns="12700">
+          <a:bodyPr wrap="square" lIns="25400" tIns="12700" rIns="25400" bIns="12700">
             <a:normAutofit/>
           </a:bodyPr>
           <a:lstStyle/>
@@ -9831,6 +9956,7 @@
           <a:lstStyle/>
           <a:p>
             <a:pPr algn="ctr"/>
+            <a:endParaRPr/>
           </a:p>
         </p:txBody>
       </p:sp>
@@ -9851,7 +9977,7 @@
           <a:noFill/>
         </p:spPr>
         <p:txBody>
-          <a:bodyPr wrap="square" lIns="25400" rIns="25400" tIns="12700" bIns="12700">
+          <a:bodyPr wrap="square" lIns="25400" tIns="12700" rIns="25400" bIns="12700">
             <a:normAutofit/>
           </a:bodyPr>
           <a:lstStyle/>
@@ -9913,6 +10039,7 @@
           <a:lstStyle/>
           <a:p>
             <a:pPr algn="ctr"/>
+            <a:endParaRPr/>
           </a:p>
         </p:txBody>
       </p:sp>
@@ -9933,7 +10060,7 @@
           <a:noFill/>
         </p:spPr>
         <p:txBody>
-          <a:bodyPr wrap="square" lIns="25400" rIns="25400" tIns="12700" bIns="12700">
+          <a:bodyPr wrap="square" lIns="25400" tIns="12700" rIns="25400" bIns="12700">
             <a:normAutofit/>
           </a:bodyPr>
           <a:lstStyle/>
@@ -9959,16 +10086,16 @@
         </p:nvSpPr>
         <p:spPr>
           <a:xfrm>
-            <a:off x="5029200" y="3547872"/>
-            <a:ext cx="1362456" cy="219456"/>
-          </a:xfrm>
-          <a:prstGeom prst="rect">
-            <a:avLst/>
-          </a:prstGeom>
-          <a:noFill/>
-        </p:spPr>
-        <p:txBody>
-          <a:bodyPr wrap="square" lIns="25400" rIns="25400" tIns="12700" bIns="12700">
+            <a:off x="5029200" y="3456432"/>
+            <a:ext cx="1362456" cy="310896"/>
+          </a:xfrm>
+          <a:prstGeom prst="rect">
+            <a:avLst/>
+          </a:prstGeom>
+          <a:noFill/>
+        </p:spPr>
+        <p:txBody>
+          <a:bodyPr wrap="square" lIns="25400" tIns="12700" rIns="25400" bIns="12700" anchor="b">
             <a:normAutofit/>
           </a:bodyPr>
           <a:lstStyle/>
@@ -10030,6 +10157,7 @@
           <a:lstStyle/>
           <a:p>
             <a:pPr algn="ctr"/>
+            <a:endParaRPr/>
           </a:p>
         </p:txBody>
       </p:sp>
@@ -10050,7 +10178,7 @@
           <a:noFill/>
         </p:spPr>
         <p:txBody>
-          <a:bodyPr wrap="square" lIns="25400" rIns="25400" tIns="12700" bIns="12700">
+          <a:bodyPr wrap="square" lIns="25400" tIns="12700" rIns="25400" bIns="12700">
             <a:normAutofit/>
           </a:bodyPr>
           <a:lstStyle/>
@@ -10076,23 +10204,23 @@
         </p:nvSpPr>
         <p:spPr>
           <a:xfrm>
-            <a:off x="6912864" y="3547872"/>
-            <a:ext cx="2414016" cy="219456"/>
-          </a:xfrm>
-          <a:prstGeom prst="rect">
-            <a:avLst/>
-          </a:prstGeom>
-          <a:noFill/>
-        </p:spPr>
-        <p:txBody>
-          <a:bodyPr wrap="square" lIns="25400" rIns="25400" tIns="12700" bIns="12700">
+            <a:off x="6912864" y="3456432"/>
+            <a:ext cx="2414016" cy="310896"/>
+          </a:xfrm>
+          <a:prstGeom prst="rect">
+            <a:avLst/>
+          </a:prstGeom>
+          <a:noFill/>
+        </p:spPr>
+        <p:txBody>
+          <a:bodyPr wrap="square" lIns="25400" tIns="12700" rIns="25400" bIns="12700" anchor="b">
             <a:normAutofit/>
           </a:bodyPr>
           <a:lstStyle/>
           <a:p>
             <a:pPr algn="l"/>
             <a:r>
-              <a:rPr sz="919" b="0">
+              <a:rPr sz="919" b="0" dirty="0">
                 <a:solidFill>
                   <a:srgbClr val="324463"/>
                 </a:solidFill>
@@ -10147,6 +10275,7 @@
           <a:lstStyle/>
           <a:p>
             <a:pPr algn="ctr"/>
+            <a:endParaRPr/>
           </a:p>
         </p:txBody>
       </p:sp>
@@ -10167,7 +10296,7 @@
           <a:noFill/>
         </p:spPr>
         <p:txBody>
-          <a:bodyPr wrap="square" lIns="25400" rIns="25400" tIns="12700" bIns="12700">
+          <a:bodyPr wrap="square" lIns="25400" tIns="12700" rIns="25400" bIns="12700">
             <a:normAutofit/>
           </a:bodyPr>
           <a:lstStyle/>
@@ -10202,7 +10331,7 @@
           <a:noFill/>
         </p:spPr>
         <p:txBody>
-          <a:bodyPr wrap="square" lIns="50800" rIns="50800" tIns="25400" bIns="25400">
+          <a:bodyPr wrap="square" lIns="50800" tIns="25400" rIns="50800" bIns="25400">
             <a:normAutofit/>
           </a:bodyPr>
           <a:lstStyle/>
@@ -10213,13 +10342,22 @@
               </a:spcAft>
             </a:pPr>
             <a:r>
-              <a:rPr sz="819" b="0">
+              <a:rPr sz="819" b="0" dirty="0" err="1">
                 <a:solidFill>
                   <a:srgbClr val="324463"/>
                 </a:solidFill>
                 <a:latin typeface="IBM Plex Sans"/>
               </a:rPr>
-              <a:t>parcel_visible: true</a:t>
+              <a:t>parcel_visible</a:t>
+            </a:r>
+            <a:r>
+              <a:rPr sz="819" b="0" dirty="0">
+                <a:solidFill>
+                  <a:srgbClr val="324463"/>
+                </a:solidFill>
+                <a:latin typeface="IBM Plex Sans"/>
+              </a:rPr>
+              <a:t>: true</a:t>
             </a:r>
           </a:p>
           <a:p>
@@ -10229,13 +10367,22 @@
               </a:spcAft>
             </a:pPr>
             <a:r>
-              <a:rPr sz="819" b="0">
+              <a:rPr sz="819" b="0" dirty="0" err="1">
                 <a:solidFill>
                   <a:srgbClr val="324463"/>
                 </a:solidFill>
                 <a:latin typeface="IBM Plex Sans"/>
               </a:rPr>
-              <a:t>proof_status: accept</a:t>
+              <a:t>proof_status</a:t>
+            </a:r>
+            <a:r>
+              <a:rPr sz="819" b="0" dirty="0">
+                <a:solidFill>
+                  <a:srgbClr val="324463"/>
+                </a:solidFill>
+                <a:latin typeface="IBM Plex Sans"/>
+              </a:rPr>
+              <a:t>: accept</a:t>
             </a:r>
           </a:p>
           <a:p>
@@ -10245,13 +10392,22 @@
               </a:spcAft>
             </a:pPr>
             <a:r>
-              <a:rPr sz="819" b="0">
+              <a:rPr sz="819" b="0" dirty="0" err="1">
                 <a:solidFill>
                   <a:srgbClr val="324463"/>
                 </a:solidFill>
                 <a:latin typeface="IBM Plex Sans"/>
               </a:rPr>
-              <a:t>review_required: false</a:t>
+              <a:t>review_required</a:t>
+            </a:r>
+            <a:r>
+              <a:rPr sz="819" b="0" dirty="0">
+                <a:solidFill>
+                  <a:srgbClr val="324463"/>
+                </a:solidFill>
+                <a:latin typeface="IBM Plex Sans"/>
+              </a:rPr>
+              <a:t>: false</a:t>
             </a:r>
           </a:p>
         </p:txBody>
@@ -10300,6 +10456,7 @@
           <a:lstStyle/>
           <a:p>
             <a:pPr algn="ctr"/>
+            <a:endParaRPr/>
           </a:p>
         </p:txBody>
       </p:sp>
@@ -10320,7 +10477,7 @@
           <a:noFill/>
         </p:spPr>
         <p:txBody>
-          <a:bodyPr wrap="square" lIns="25400" rIns="25400" tIns="12700" bIns="12700">
+          <a:bodyPr wrap="square" lIns="25400" tIns="12700" rIns="25400" bIns="12700">
             <a:normAutofit/>
           </a:bodyPr>
           <a:lstStyle/>
@@ -10355,7 +10512,7 @@
           <a:noFill/>
         </p:spPr>
         <p:txBody>
-          <a:bodyPr wrap="square" lIns="50800" rIns="50800" tIns="25400" bIns="25400">
+          <a:bodyPr wrap="square" lIns="50800" tIns="25400" rIns="50800" bIns="25400">
             <a:normAutofit/>
           </a:bodyPr>
           <a:lstStyle/>
@@ -10434,7 +10591,7 @@
 </file>
 
 <file path=ppt/slides/slide6.xml><?xml version="1.0" encoding="utf-8"?>
-<p:sld xmlns:a="http://schemas.openxmlformats.org/drawingml/2006/main" xmlns:p="http://schemas.openxmlformats.org/presentationml/2006/main" xmlns:r="http://schemas.openxmlformats.org/officeDocument/2006/relationships">
+<p:sld xmlns:a="http://schemas.openxmlformats.org/drawingml/2006/main" xmlns:r="http://schemas.openxmlformats.org/officeDocument/2006/relationships" xmlns:p="http://schemas.openxmlformats.org/presentationml/2006/main">
   <p:cSld>
     <p:bg>
       <p:bgPr>
@@ -10450,7 +10607,14 @@
         <p:cNvGrpSpPr/>
         <p:nvPr/>
       </p:nvGrpSpPr>
-      <p:grpSpPr/>
+      <p:grpSpPr>
+        <a:xfrm>
+          <a:off x="0" y="0"/>
+          <a:ext cx="0" cy="0"/>
+          <a:chOff x="0" y="0"/>
+          <a:chExt cx="0" cy="0"/>
+        </a:xfrm>
+      </p:grpSpPr>
       <p:pic>
         <p:nvPicPr>
           <p:cNvPr id="2" name="Picture 1" descr="fracto_logo.png"/>
@@ -10492,7 +10656,7 @@
           <a:noFill/>
         </p:spPr>
         <p:txBody>
-          <a:bodyPr wrap="square" lIns="25400" rIns="25400" tIns="12700" bIns="12700">
+          <a:bodyPr wrap="square" lIns="25400" tIns="12700" rIns="25400" bIns="12700">
             <a:normAutofit/>
           </a:bodyPr>
           <a:lstStyle/>
@@ -10527,7 +10691,7 @@
           <a:noFill/>
         </p:spPr>
         <p:txBody>
-          <a:bodyPr wrap="square" lIns="25400" rIns="25400" tIns="12700" bIns="12700">
+          <a:bodyPr wrap="square" lIns="25400" tIns="12700" rIns="25400" bIns="12700">
             <a:normAutofit/>
           </a:bodyPr>
           <a:lstStyle/>
@@ -10562,7 +10726,7 @@
           <a:noFill/>
         </p:spPr>
         <p:txBody>
-          <a:bodyPr wrap="square" lIns="25400" rIns="25400" tIns="12700" bIns="12700">
+          <a:bodyPr wrap="square" lIns="25400" tIns="12700" rIns="25400" bIns="12700">
             <a:normAutofit/>
           </a:bodyPr>
           <a:lstStyle/>
@@ -10622,6 +10786,7 @@
           <a:lstStyle/>
           <a:p>
             <a:pPr algn="ctr"/>
+            <a:endParaRPr/>
           </a:p>
         </p:txBody>
       </p:sp>
@@ -10642,7 +10807,7 @@
           <a:noFill/>
         </p:spPr>
         <p:txBody>
-          <a:bodyPr wrap="square" lIns="25400" rIns="25400" tIns="12700" bIns="12700">
+          <a:bodyPr wrap="square" lIns="25400" tIns="12700" rIns="25400" bIns="12700">
             <a:normAutofit/>
           </a:bodyPr>
           <a:lstStyle/>
@@ -10677,7 +10842,7 @@
           <a:noFill/>
         </p:spPr>
         <p:txBody>
-          <a:bodyPr wrap="square" lIns="25400" rIns="25400" tIns="12700" bIns="12700">
+          <a:bodyPr wrap="square" lIns="25400" tIns="12700" rIns="25400" bIns="12700">
             <a:normAutofit/>
           </a:bodyPr>
           <a:lstStyle/>
@@ -10739,6 +10904,7 @@
           <a:lstStyle/>
           <a:p>
             <a:pPr algn="ctr"/>
+            <a:endParaRPr/>
           </a:p>
         </p:txBody>
       </p:sp>
@@ -10759,7 +10925,7 @@
           <a:noFill/>
         </p:spPr>
         <p:txBody>
-          <a:bodyPr wrap="square" lIns="25400" rIns="25400" tIns="12700" bIns="12700">
+          <a:bodyPr wrap="square" lIns="25400" tIns="12700" rIns="25400" bIns="12700">
             <a:normAutofit/>
           </a:bodyPr>
           <a:lstStyle/>
@@ -10794,7 +10960,7 @@
           <a:noFill/>
         </p:spPr>
         <p:txBody>
-          <a:bodyPr wrap="square" lIns="25400" rIns="25400" tIns="12700" bIns="12700">
+          <a:bodyPr wrap="square" lIns="25400" tIns="12700" rIns="25400" bIns="12700">
             <a:normAutofit/>
           </a:bodyPr>
           <a:lstStyle/>
@@ -10829,7 +10995,7 @@
           <a:noFill/>
         </p:spPr>
         <p:txBody>
-          <a:bodyPr wrap="square" lIns="25400" rIns="25400" tIns="12700" bIns="12700">
+          <a:bodyPr wrap="square" lIns="25400" tIns="12700" rIns="25400" bIns="12700">
             <a:normAutofit/>
           </a:bodyPr>
           <a:lstStyle/>
@@ -10864,7 +11030,7 @@
           <a:noFill/>
         </p:spPr>
         <p:txBody>
-          <a:bodyPr wrap="square" lIns="25400" rIns="25400" tIns="12700" bIns="12700">
+          <a:bodyPr wrap="square" lIns="25400" tIns="12700" rIns="25400" bIns="12700">
             <a:normAutofit/>
           </a:bodyPr>
           <a:lstStyle/>
@@ -10926,6 +11092,7 @@
           <a:lstStyle/>
           <a:p>
             <a:pPr algn="ctr"/>
+            <a:endParaRPr/>
           </a:p>
         </p:txBody>
       </p:sp>
@@ -10946,7 +11113,7 @@
           <a:noFill/>
         </p:spPr>
         <p:txBody>
-          <a:bodyPr wrap="square" lIns="25400" rIns="25400" tIns="12700" bIns="12700">
+          <a:bodyPr wrap="square" lIns="25400" tIns="12700" rIns="25400" bIns="12700">
             <a:normAutofit/>
           </a:bodyPr>
           <a:lstStyle/>
@@ -10981,7 +11148,7 @@
           <a:noFill/>
         </p:spPr>
         <p:txBody>
-          <a:bodyPr wrap="square" lIns="25400" rIns="25400" tIns="12700" bIns="12700">
+          <a:bodyPr wrap="square" lIns="25400" tIns="12700" rIns="25400" bIns="12700">
             <a:normAutofit/>
           </a:bodyPr>
           <a:lstStyle/>
@@ -11016,7 +11183,7 @@
           <a:noFill/>
         </p:spPr>
         <p:txBody>
-          <a:bodyPr wrap="square" lIns="25400" rIns="25400" tIns="12700" bIns="12700">
+          <a:bodyPr wrap="square" lIns="25400" tIns="12700" rIns="25400" bIns="12700">
             <a:normAutofit/>
           </a:bodyPr>
           <a:lstStyle/>
@@ -11051,7 +11218,7 @@
           <a:noFill/>
         </p:spPr>
         <p:txBody>
-          <a:bodyPr wrap="square" lIns="25400" rIns="25400" tIns="12700" bIns="12700">
+          <a:bodyPr wrap="square" lIns="25400" tIns="12700" rIns="25400" bIns="12700">
             <a:normAutofit/>
           </a:bodyPr>
           <a:lstStyle/>
@@ -11113,6 +11280,7 @@
           <a:lstStyle/>
           <a:p>
             <a:pPr algn="ctr"/>
+            <a:endParaRPr/>
           </a:p>
         </p:txBody>
       </p:sp>
@@ -11133,7 +11301,7 @@
           <a:noFill/>
         </p:spPr>
         <p:txBody>
-          <a:bodyPr wrap="square" lIns="25400" rIns="25400" tIns="12700" bIns="12700">
+          <a:bodyPr wrap="square" lIns="25400" tIns="12700" rIns="25400" bIns="12700">
             <a:normAutofit/>
           </a:bodyPr>
           <a:lstStyle/>
@@ -11168,7 +11336,7 @@
           <a:noFill/>
         </p:spPr>
         <p:txBody>
-          <a:bodyPr wrap="square" lIns="25400" rIns="25400" tIns="12700" bIns="12700">
+          <a:bodyPr wrap="square" lIns="25400" tIns="12700" rIns="25400" bIns="12700">
             <a:normAutofit/>
           </a:bodyPr>
           <a:lstStyle/>
@@ -11203,7 +11371,7 @@
           <a:noFill/>
         </p:spPr>
         <p:txBody>
-          <a:bodyPr wrap="square" lIns="25400" rIns="25400" tIns="12700" bIns="12700">
+          <a:bodyPr wrap="square" lIns="25400" tIns="12700" rIns="25400" bIns="12700">
             <a:normAutofit/>
           </a:bodyPr>
           <a:lstStyle/>
@@ -11238,7 +11406,7 @@
           <a:noFill/>
         </p:spPr>
         <p:txBody>
-          <a:bodyPr wrap="square" lIns="25400" rIns="25400" tIns="12700" bIns="12700">
+          <a:bodyPr wrap="square" lIns="25400" tIns="12700" rIns="25400" bIns="12700">
             <a:normAutofit/>
           </a:bodyPr>
           <a:lstStyle/>
@@ -11300,6 +11468,7 @@
           <a:lstStyle/>
           <a:p>
             <a:pPr algn="ctr"/>
+            <a:endParaRPr/>
           </a:p>
         </p:txBody>
       </p:sp>
@@ -11320,7 +11489,7 @@
           <a:noFill/>
         </p:spPr>
         <p:txBody>
-          <a:bodyPr wrap="square" lIns="25400" rIns="25400" tIns="12700" bIns="12700">
+          <a:bodyPr wrap="square" lIns="25400" tIns="12700" rIns="25400" bIns="12700">
             <a:normAutofit/>
           </a:bodyPr>
           <a:lstStyle/>
@@ -11355,7 +11524,7 @@
           <a:noFill/>
         </p:spPr>
         <p:txBody>
-          <a:bodyPr wrap="square" lIns="25400" rIns="25400" tIns="12700" bIns="12700">
+          <a:bodyPr wrap="square" lIns="25400" tIns="12700" rIns="25400" bIns="12700">
             <a:normAutofit/>
           </a:bodyPr>
           <a:lstStyle/>
@@ -11390,7 +11559,7 @@
           <a:noFill/>
         </p:spPr>
         <p:txBody>
-          <a:bodyPr wrap="square" lIns="25400" rIns="25400" tIns="12700" bIns="12700">
+          <a:bodyPr wrap="square" lIns="25400" tIns="12700" rIns="25400" bIns="12700">
             <a:normAutofit/>
           </a:bodyPr>
           <a:lstStyle/>
@@ -11452,6 +11621,7 @@
           <a:lstStyle/>
           <a:p>
             <a:pPr algn="ctr"/>
+            <a:endParaRPr/>
           </a:p>
         </p:txBody>
       </p:sp>
@@ -11472,7 +11642,7 @@
           <a:noFill/>
         </p:spPr>
         <p:txBody>
-          <a:bodyPr wrap="square" lIns="25400" rIns="25400" tIns="12700" bIns="12700">
+          <a:bodyPr wrap="square" lIns="25400" tIns="12700" rIns="25400" bIns="12700">
             <a:normAutofit/>
           </a:bodyPr>
           <a:lstStyle/>
@@ -11507,7 +11677,7 @@
           <a:noFill/>
         </p:spPr>
         <p:txBody>
-          <a:bodyPr wrap="square" lIns="50800" rIns="50800" tIns="25400" bIns="25400">
+          <a:bodyPr wrap="square" lIns="50800" tIns="25400" rIns="50800" bIns="25400">
             <a:normAutofit/>
           </a:bodyPr>
           <a:lstStyle/>
@@ -11637,6 +11807,7 @@
           <a:lstStyle/>
           <a:p>
             <a:pPr algn="ctr"/>
+            <a:endParaRPr/>
           </a:p>
         </p:txBody>
       </p:sp>
@@ -11657,7 +11828,7 @@
           <a:noFill/>
         </p:spPr>
         <p:txBody>
-          <a:bodyPr wrap="square" lIns="25400" rIns="25400" tIns="12700" bIns="12700">
+          <a:bodyPr wrap="square" lIns="25400" tIns="12700" rIns="25400" bIns="12700">
             <a:normAutofit/>
           </a:bodyPr>
           <a:lstStyle/>
@@ -11692,7 +11863,7 @@
           <a:noFill/>
         </p:spPr>
         <p:txBody>
-          <a:bodyPr wrap="square" lIns="50800" rIns="50800" tIns="25400" bIns="25400">
+          <a:bodyPr wrap="square" lIns="50800" tIns="25400" rIns="50800" bIns="25400">
             <a:normAutofit/>
           </a:bodyPr>
           <a:lstStyle/>
@@ -11771,7 +11942,7 @@
 </file>
 
 <file path=ppt/slides/slide7.xml><?xml version="1.0" encoding="utf-8"?>
-<p:sld xmlns:a="http://schemas.openxmlformats.org/drawingml/2006/main" xmlns:p="http://schemas.openxmlformats.org/presentationml/2006/main" xmlns:r="http://schemas.openxmlformats.org/officeDocument/2006/relationships">
+<p:sld xmlns:a="http://schemas.openxmlformats.org/drawingml/2006/main" xmlns:r="http://schemas.openxmlformats.org/officeDocument/2006/relationships" xmlns:p="http://schemas.openxmlformats.org/presentationml/2006/main">
   <p:cSld>
     <p:bg>
       <p:bgPr>
@@ -11787,7 +11958,14 @@
         <p:cNvGrpSpPr/>
         <p:nvPr/>
       </p:nvGrpSpPr>
-      <p:grpSpPr/>
+      <p:grpSpPr>
+        <a:xfrm>
+          <a:off x="0" y="0"/>
+          <a:ext cx="0" cy="0"/>
+          <a:chOff x="0" y="0"/>
+          <a:chExt cx="0" cy="0"/>
+        </a:xfrm>
+      </p:grpSpPr>
       <p:pic>
         <p:nvPicPr>
           <p:cNvPr id="2" name="Picture 1" descr="fracto_logo.png"/>
@@ -11829,7 +12007,7 @@
           <a:noFill/>
         </p:spPr>
         <p:txBody>
-          <a:bodyPr wrap="square" lIns="25400" rIns="25400" tIns="12700" bIns="12700">
+          <a:bodyPr wrap="square" lIns="25400" tIns="12700" rIns="25400" bIns="12700">
             <a:normAutofit/>
           </a:bodyPr>
           <a:lstStyle/>
@@ -11864,7 +12042,7 @@
           <a:noFill/>
         </p:spPr>
         <p:txBody>
-          <a:bodyPr wrap="square" lIns="25400" rIns="25400" tIns="12700" bIns="12700">
+          <a:bodyPr wrap="square" lIns="25400" tIns="12700" rIns="25400" bIns="12700">
             <a:normAutofit/>
           </a:bodyPr>
           <a:lstStyle/>
@@ -11899,7 +12077,7 @@
           <a:noFill/>
         </p:spPr>
         <p:txBody>
-          <a:bodyPr wrap="square" lIns="25400" rIns="25400" tIns="12700" bIns="12700">
+          <a:bodyPr wrap="square" lIns="25400" tIns="12700" rIns="25400" bIns="12700">
             <a:normAutofit/>
           </a:bodyPr>
           <a:lstStyle/>
@@ -11959,6 +12137,7 @@
           <a:lstStyle/>
           <a:p>
             <a:pPr algn="ctr"/>
+            <a:endParaRPr/>
           </a:p>
         </p:txBody>
       </p:sp>
@@ -11979,7 +12158,7 @@
           <a:noFill/>
         </p:spPr>
         <p:txBody>
-          <a:bodyPr wrap="square" lIns="25400" rIns="25400" tIns="12700" bIns="12700">
+          <a:bodyPr wrap="square" lIns="25400" tIns="12700" rIns="25400" bIns="12700">
             <a:normAutofit/>
           </a:bodyPr>
           <a:lstStyle/>
@@ -12014,7 +12193,7 @@
           <a:noFill/>
         </p:spPr>
         <p:txBody>
-          <a:bodyPr wrap="square" lIns="25400" rIns="25400" tIns="12700" bIns="12700">
+          <a:bodyPr wrap="square" lIns="25400" tIns="12700" rIns="25400" bIns="12700">
             <a:normAutofit/>
           </a:bodyPr>
           <a:lstStyle/>
@@ -12040,29 +12219,47 @@
         </p:nvSpPr>
         <p:spPr>
           <a:xfrm>
-            <a:off x="658368" y="2633472"/>
-            <a:ext cx="7635240" cy="292608"/>
-          </a:xfrm>
-          <a:prstGeom prst="rect">
-            <a:avLst/>
-          </a:prstGeom>
-          <a:noFill/>
-        </p:spPr>
-        <p:txBody>
-          <a:bodyPr wrap="square" lIns="25400" rIns="25400" tIns="12700" bIns="12700">
+            <a:off x="658368" y="1801368"/>
+            <a:ext cx="7635240" cy="1124712"/>
+          </a:xfrm>
+          <a:prstGeom prst="rect">
+            <a:avLst/>
+          </a:prstGeom>
+          <a:noFill/>
+        </p:spPr>
+        <p:txBody>
+          <a:bodyPr wrap="square" lIns="25400" tIns="12700" rIns="25400" bIns="12700" anchor="b">
             <a:normAutofit/>
           </a:bodyPr>
           <a:lstStyle/>
           <a:p>
             <a:pPr algn="l"/>
             <a:r>
-              <a:rPr sz="1019" b="0">
+              <a:rPr sz="1019" b="0" dirty="0">
                 <a:solidFill>
                   <a:srgbClr val="324463"/>
                 </a:solidFill>
                 <a:latin typeface="IBM Plex Sans"/>
               </a:rPr>
-              <a:t>Help improve {{outcome_1}}, {{outcome_2}}, and {{outcome_3}} across {{primary_workflow}}.</a:t>
+              <a:t>Help improve {{outcome_1}}, {{outcome_2}}, and {{outcome_3}} across {{</a:t>
+            </a:r>
+            <a:r>
+              <a:rPr sz="1019" b="0" dirty="0" err="1">
+                <a:solidFill>
+                  <a:srgbClr val="324463"/>
+                </a:solidFill>
+                <a:latin typeface="IBM Plex Sans"/>
+              </a:rPr>
+              <a:t>primary_workflow</a:t>
+            </a:r>
+            <a:r>
+              <a:rPr sz="1019" b="0" dirty="0">
+                <a:solidFill>
+                  <a:srgbClr val="324463"/>
+                </a:solidFill>
+                <a:latin typeface="IBM Plex Sans"/>
+              </a:rPr>
+              <a:t>}}.</a:t>
             </a:r>
           </a:p>
         </p:txBody>
@@ -12111,6 +12308,7 @@
           <a:lstStyle/>
           <a:p>
             <a:pPr algn="ctr"/>
+            <a:endParaRPr/>
           </a:p>
         </p:txBody>
       </p:sp>
@@ -12131,7 +12329,7 @@
           <a:noFill/>
         </p:spPr>
         <p:txBody>
-          <a:bodyPr wrap="square" lIns="25400" rIns="25400" tIns="12700" bIns="12700">
+          <a:bodyPr wrap="square" lIns="25400" tIns="12700" rIns="25400" bIns="12700">
             <a:normAutofit/>
           </a:bodyPr>
           <a:lstStyle/>
@@ -12166,7 +12364,7 @@
           <a:noFill/>
         </p:spPr>
         <p:txBody>
-          <a:bodyPr wrap="square" lIns="25400" rIns="25400" tIns="12700" bIns="12700">
+          <a:bodyPr wrap="square" lIns="25400" tIns="12700" rIns="25400" bIns="12700">
             <a:normAutofit/>
           </a:bodyPr>
           <a:lstStyle/>
@@ -12228,6 +12426,7 @@
           <a:lstStyle/>
           <a:p>
             <a:pPr algn="ctr"/>
+            <a:endParaRPr/>
           </a:p>
         </p:txBody>
       </p:sp>
@@ -12248,7 +12447,7 @@
           <a:noFill/>
         </p:spPr>
         <p:txBody>
-          <a:bodyPr wrap="square" lIns="25400" rIns="25400" tIns="12700" bIns="12700">
+          <a:bodyPr wrap="square" lIns="25400" tIns="12700" rIns="25400" bIns="12700">
             <a:normAutofit/>
           </a:bodyPr>
           <a:lstStyle/>
@@ -12283,7 +12482,7 @@
           <a:noFill/>
         </p:spPr>
         <p:txBody>
-          <a:bodyPr wrap="square" lIns="25400" rIns="25400" tIns="12700" bIns="12700">
+          <a:bodyPr wrap="square" lIns="25400" tIns="12700" rIns="25400" bIns="12700">
             <a:normAutofit/>
           </a:bodyPr>
           <a:lstStyle/>
@@ -12345,6 +12544,7 @@
           <a:lstStyle/>
           <a:p>
             <a:pPr algn="ctr"/>
+            <a:endParaRPr/>
           </a:p>
         </p:txBody>
       </p:sp>
@@ -12365,7 +12565,7 @@
           <a:noFill/>
         </p:spPr>
         <p:txBody>
-          <a:bodyPr wrap="square" lIns="25400" rIns="25400" tIns="12700" bIns="12700">
+          <a:bodyPr wrap="square" lIns="25400" tIns="12700" rIns="25400" bIns="12700">
             <a:normAutofit/>
           </a:bodyPr>
           <a:lstStyle/>
@@ -12400,7 +12600,7 @@
           <a:noFill/>
         </p:spPr>
         <p:txBody>
-          <a:bodyPr wrap="square" lIns="25400" rIns="25400" tIns="12700" bIns="12700">
+          <a:bodyPr wrap="square" lIns="25400" tIns="12700" rIns="25400" bIns="12700">
             <a:normAutofit/>
           </a:bodyPr>
           <a:lstStyle/>
@@ -12462,6 +12662,7 @@
           <a:lstStyle/>
           <a:p>
             <a:pPr algn="ctr"/>
+            <a:endParaRPr/>
           </a:p>
         </p:txBody>
       </p:sp>
@@ -12482,7 +12683,7 @@
           <a:noFill/>
         </p:spPr>
         <p:txBody>
-          <a:bodyPr wrap="square" lIns="25400" rIns="25400" tIns="12700" bIns="12700">
+          <a:bodyPr wrap="square" lIns="25400" tIns="12700" rIns="25400" bIns="12700">
             <a:normAutofit/>
           </a:bodyPr>
           <a:lstStyle/>
@@ -12517,7 +12718,7 @@
           <a:noFill/>
         </p:spPr>
         <p:txBody>
-          <a:bodyPr wrap="square" lIns="50800" rIns="50800" tIns="25400" bIns="25400">
+          <a:bodyPr wrap="square" lIns="50800" tIns="25400" rIns="50800" bIns="25400">
             <a:normAutofit/>
           </a:bodyPr>
           <a:lstStyle/>
@@ -12631,6 +12832,7 @@
           <a:lstStyle/>
           <a:p>
             <a:pPr algn="ctr"/>
+            <a:endParaRPr/>
           </a:p>
         </p:txBody>
       </p:sp>
@@ -12651,7 +12853,7 @@
           <a:noFill/>
         </p:spPr>
         <p:txBody>
-          <a:bodyPr wrap="square" lIns="25400" rIns="25400" tIns="12700" bIns="12700">
+          <a:bodyPr wrap="square" lIns="25400" tIns="12700" rIns="25400" bIns="12700">
             <a:normAutofit/>
           </a:bodyPr>
           <a:lstStyle/>
@@ -12686,7 +12888,7 @@
           <a:noFill/>
         </p:spPr>
         <p:txBody>
-          <a:bodyPr wrap="square" lIns="50800" rIns="50800" tIns="25400" bIns="25400">
+          <a:bodyPr wrap="square" lIns="50800" tIns="25400" rIns="50800" bIns="25400">
             <a:normAutofit/>
           </a:bodyPr>
           <a:lstStyle/>
@@ -12765,7 +12967,7 @@
 </file>
 
 <file path=ppt/slides/slide8.xml><?xml version="1.0" encoding="utf-8"?>
-<p:sld xmlns:a="http://schemas.openxmlformats.org/drawingml/2006/main" xmlns:p="http://schemas.openxmlformats.org/presentationml/2006/main" xmlns:r="http://schemas.openxmlformats.org/officeDocument/2006/relationships">
+<p:sld xmlns:a="http://schemas.openxmlformats.org/drawingml/2006/main" xmlns:r="http://schemas.openxmlformats.org/officeDocument/2006/relationships" xmlns:p="http://schemas.openxmlformats.org/presentationml/2006/main">
   <p:cSld>
     <p:bg>
       <p:bgPr>
@@ -12781,7 +12983,14 @@
         <p:cNvGrpSpPr/>
         <p:nvPr/>
       </p:nvGrpSpPr>
-      <p:grpSpPr/>
+      <p:grpSpPr>
+        <a:xfrm>
+          <a:off x="0" y="0"/>
+          <a:ext cx="0" cy="0"/>
+          <a:chOff x="0" y="0"/>
+          <a:chExt cx="0" cy="0"/>
+        </a:xfrm>
+      </p:grpSpPr>
       <p:pic>
         <p:nvPicPr>
           <p:cNvPr id="2" name="Picture 1" descr="fracto_logo.png"/>
@@ -12823,7 +13032,7 @@
           <a:noFill/>
         </p:spPr>
         <p:txBody>
-          <a:bodyPr wrap="square" lIns="25400" rIns="25400" tIns="12700" bIns="12700">
+          <a:bodyPr wrap="square" lIns="25400" tIns="12700" rIns="25400" bIns="12700">
             <a:normAutofit/>
           </a:bodyPr>
           <a:lstStyle/>
@@ -12858,7 +13067,7 @@
           <a:noFill/>
         </p:spPr>
         <p:txBody>
-          <a:bodyPr wrap="square" lIns="25400" rIns="25400" tIns="12700" bIns="12700">
+          <a:bodyPr wrap="square" lIns="25400" tIns="12700" rIns="25400" bIns="12700">
             <a:normAutofit/>
           </a:bodyPr>
           <a:lstStyle/>
@@ -12893,7 +13102,7 @@
           <a:noFill/>
         </p:spPr>
         <p:txBody>
-          <a:bodyPr wrap="square" lIns="25400" rIns="25400" tIns="12700" bIns="12700">
+          <a:bodyPr wrap="square" lIns="25400" tIns="12700" rIns="25400" bIns="12700">
             <a:normAutofit/>
           </a:bodyPr>
           <a:lstStyle/>
@@ -12953,6 +13162,7 @@
           <a:lstStyle/>
           <a:p>
             <a:pPr algn="ctr"/>
+            <a:endParaRPr/>
           </a:p>
         </p:txBody>
       </p:sp>
@@ -12973,7 +13183,7 @@
           <a:noFill/>
         </p:spPr>
         <p:txBody>
-          <a:bodyPr wrap="square" lIns="25400" rIns="25400" tIns="12700" bIns="12700">
+          <a:bodyPr wrap="square" lIns="25400" tIns="12700" rIns="25400" bIns="12700">
             <a:normAutofit/>
           </a:bodyPr>
           <a:lstStyle/>
@@ -13008,7 +13218,7 @@
           <a:noFill/>
         </p:spPr>
         <p:txBody>
-          <a:bodyPr wrap="square" lIns="25400" rIns="25400" tIns="12700" bIns="12700">
+          <a:bodyPr wrap="square" lIns="25400" tIns="12700" rIns="25400" bIns="12700">
             <a:normAutofit/>
           </a:bodyPr>
           <a:lstStyle/>
@@ -13043,14 +13253,14 @@
           <a:noFill/>
         </p:spPr>
         <p:txBody>
-          <a:bodyPr wrap="square" lIns="25400" rIns="25400" tIns="12700" bIns="12700">
+          <a:bodyPr wrap="square" lIns="25400" tIns="12700" rIns="25400" bIns="12700">
             <a:normAutofit/>
           </a:bodyPr>
           <a:lstStyle/>
           <a:p>
             <a:pPr algn="l"/>
             <a:r>
-              <a:rPr sz="1060" b="0">
+              <a:rPr sz="1060" b="0" dirty="0">
                 <a:solidFill>
                   <a:srgbClr val="324463"/>
                 </a:solidFill>
@@ -13105,6 +13315,7 @@
           <a:lstStyle/>
           <a:p>
             <a:pPr algn="ctr"/>
+            <a:endParaRPr/>
           </a:p>
         </p:txBody>
       </p:sp>
@@ -13125,7 +13336,7 @@
           <a:noFill/>
         </p:spPr>
         <p:txBody>
-          <a:bodyPr wrap="square" lIns="25400" rIns="25400" tIns="12700" bIns="12700">
+          <a:bodyPr wrap="square" lIns="25400" tIns="12700" rIns="25400" bIns="12700">
             <a:normAutofit/>
           </a:bodyPr>
           <a:lstStyle/>
@@ -13160,7 +13371,7 @@
           <a:noFill/>
         </p:spPr>
         <p:txBody>
-          <a:bodyPr wrap="square" lIns="50800" rIns="50800" tIns="25400" bIns="25400">
+          <a:bodyPr wrap="square" lIns="50800" tIns="25400" rIns="50800" bIns="25400">
             <a:normAutofit/>
           </a:bodyPr>
           <a:lstStyle/>
@@ -13258,6 +13469,7 @@
           <a:lstStyle/>
           <a:p>
             <a:pPr algn="ctr"/>
+            <a:endParaRPr/>
           </a:p>
         </p:txBody>
       </p:sp>
@@ -13278,7 +13490,7 @@
           <a:noFill/>
         </p:spPr>
         <p:txBody>
-          <a:bodyPr wrap="square" lIns="25400" rIns="25400" tIns="12700" bIns="12700">
+          <a:bodyPr wrap="square" lIns="25400" tIns="12700" rIns="25400" bIns="12700">
             <a:normAutofit/>
           </a:bodyPr>
           <a:lstStyle/>
@@ -13313,20 +13525,20 @@
           <a:noFill/>
         </p:spPr>
         <p:txBody>
-          <a:bodyPr wrap="square" lIns="25400" rIns="25400" tIns="12700" bIns="12700">
+          <a:bodyPr wrap="square" lIns="25400" tIns="12700" rIns="25400" bIns="12700">
             <a:normAutofit/>
           </a:bodyPr>
           <a:lstStyle/>
           <a:p>
             <a:pPr algn="l"/>
             <a:r>
-              <a:rPr sz="1120" b="0">
+              <a:rPr sz="1120" b="0" dirty="0">
                 <a:solidFill>
                   <a:srgbClr val="FFFFFF"/>
                 </a:solidFill>
                 <a:latin typeface="IBM Plex Sans"/>
               </a:rPr>
-              <a:t>Review real delivery images first. Then scope the right integration path.</a:t>
+              <a:t>Review real delivery images. Then scope the right integration path.</a:t>
             </a:r>
           </a:p>
         </p:txBody>
@@ -13375,6 +13587,7 @@
           <a:lstStyle/>
           <a:p>
             <a:pPr algn="ctr"/>
+            <a:endParaRPr/>
           </a:p>
         </p:txBody>
       </p:sp>
@@ -13420,6 +13633,7 @@
           <a:lstStyle/>
           <a:p>
             <a:pPr algn="ctr"/>
+            <a:endParaRPr/>
           </a:p>
         </p:txBody>
       </p:sp>
@@ -13440,7 +13654,7 @@
           <a:noFill/>
         </p:spPr>
         <p:txBody>
-          <a:bodyPr wrap="square" lIns="25400" rIns="25400" tIns="12700" bIns="12700">
+          <a:bodyPr wrap="square" lIns="25400" tIns="12700" rIns="25400" bIns="12700">
             <a:normAutofit/>
           </a:bodyPr>
           <a:lstStyle/>
@@ -13475,7 +13689,7 @@
           <a:noFill/>
         </p:spPr>
         <p:txBody>
-          <a:bodyPr wrap="square" lIns="25400" rIns="25400" tIns="12700" bIns="12700">
+          <a:bodyPr wrap="square" lIns="25400" tIns="12700" rIns="25400" bIns="12700">
             <a:normAutofit/>
           </a:bodyPr>
           <a:lstStyle/>
@@ -13537,6 +13751,7 @@
           <a:lstStyle/>
           <a:p>
             <a:pPr algn="ctr"/>
+            <a:endParaRPr/>
           </a:p>
         </p:txBody>
       </p:sp>
@@ -13548,7 +13763,7 @@
         </p:nvSpPr>
         <p:spPr>
           <a:xfrm>
-            <a:off x="6355080" y="3017520"/>
+            <a:off x="6341364" y="3150108"/>
             <a:ext cx="822960" cy="164592"/>
           </a:xfrm>
           <a:prstGeom prst="rect">
@@ -13557,7 +13772,7 @@
           <a:noFill/>
         </p:spPr>
         <p:txBody>
-          <a:bodyPr wrap="square" lIns="25400" rIns="25400" tIns="12700" bIns="12700">
+          <a:bodyPr wrap="square" lIns="25400" tIns="12700" rIns="25400" bIns="12700">
             <a:normAutofit/>
           </a:bodyPr>
           <a:lstStyle/>
@@ -13583,7 +13798,7 @@
         </p:nvSpPr>
         <p:spPr>
           <a:xfrm>
-            <a:off x="7150608" y="2999232"/>
+            <a:off x="7136892" y="3131820"/>
             <a:ext cx="2148840" cy="201168"/>
           </a:xfrm>
           <a:prstGeom prst="rect">
@@ -13592,8 +13807,8 @@
           <a:noFill/>
         </p:spPr>
         <p:txBody>
-          <a:bodyPr wrap="square" lIns="25400" rIns="25400" tIns="12700" bIns="12700">
-            <a:normAutofit/>
+          <a:bodyPr wrap="square" lIns="25400" tIns="12700" rIns="25400" bIns="12700">
+            <a:normAutofit lnSpcReduction="10000"/>
           </a:bodyPr>
           <a:lstStyle/>
           <a:p>
@@ -13654,6 +13869,7 @@
           <a:lstStyle/>
           <a:p>
             <a:pPr algn="ctr"/>
+            <a:endParaRPr/>
           </a:p>
         </p:txBody>
       </p:sp>
@@ -13665,7 +13881,7 @@
         </p:nvSpPr>
         <p:spPr>
           <a:xfrm>
-            <a:off x="6355080" y="3730752"/>
+            <a:off x="6341364" y="3863340"/>
             <a:ext cx="822960" cy="164592"/>
           </a:xfrm>
           <a:prstGeom prst="rect">
@@ -13674,7 +13890,7 @@
           <a:noFill/>
         </p:spPr>
         <p:txBody>
-          <a:bodyPr wrap="square" lIns="25400" rIns="25400" tIns="12700" bIns="12700">
+          <a:bodyPr wrap="square" lIns="25400" tIns="12700" rIns="25400" bIns="12700">
             <a:normAutofit/>
           </a:bodyPr>
           <a:lstStyle/>
@@ -13700,7 +13916,7 @@
         </p:nvSpPr>
         <p:spPr>
           <a:xfrm>
-            <a:off x="7150608" y="3712463"/>
+            <a:off x="7136892" y="3845051"/>
             <a:ext cx="2148840" cy="201168"/>
           </a:xfrm>
           <a:prstGeom prst="rect">
@@ -13709,8 +13925,8 @@
           <a:noFill/>
         </p:spPr>
         <p:txBody>
-          <a:bodyPr wrap="square" lIns="25400" rIns="25400" tIns="12700" bIns="12700">
-            <a:normAutofit/>
+          <a:bodyPr wrap="square" lIns="25400" tIns="12700" rIns="25400" bIns="12700">
+            <a:normAutofit lnSpcReduction="10000"/>
           </a:bodyPr>
           <a:lstStyle/>
           <a:p>
@@ -13771,6 +13987,7 @@
           <a:lstStyle/>
           <a:p>
             <a:pPr algn="ctr"/>
+            <a:endParaRPr/>
           </a:p>
         </p:txBody>
       </p:sp>
@@ -13782,7 +13999,7 @@
         </p:nvSpPr>
         <p:spPr>
           <a:xfrm>
-            <a:off x="6355080" y="4443984"/>
+            <a:off x="6341364" y="4576572"/>
             <a:ext cx="822960" cy="164592"/>
           </a:xfrm>
           <a:prstGeom prst="rect">
@@ -13791,7 +14008,7 @@
           <a:noFill/>
         </p:spPr>
         <p:txBody>
-          <a:bodyPr wrap="square" lIns="25400" rIns="25400" tIns="12700" bIns="12700">
+          <a:bodyPr wrap="square" lIns="25400" tIns="12700" rIns="25400" bIns="12700">
             <a:normAutofit/>
           </a:bodyPr>
           <a:lstStyle/>
@@ -13817,7 +14034,7 @@
         </p:nvSpPr>
         <p:spPr>
           <a:xfrm>
-            <a:off x="7150608" y="4425696"/>
+            <a:off x="7136892" y="4558284"/>
             <a:ext cx="2148840" cy="201168"/>
           </a:xfrm>
           <a:prstGeom prst="rect">
@@ -13826,8 +14043,8 @@
           <a:noFill/>
         </p:spPr>
         <p:txBody>
-          <a:bodyPr wrap="square" lIns="25400" rIns="25400" tIns="12700" bIns="12700">
-            <a:normAutofit/>
+          <a:bodyPr wrap="square" lIns="25400" tIns="12700" rIns="25400" bIns="12700">
+            <a:normAutofit lnSpcReduction="10000"/>
           </a:bodyPr>
           <a:lstStyle/>
           <a:p>
@@ -13861,7 +14078,7 @@
           <a:noFill/>
         </p:spPr>
         <p:txBody>
-          <a:bodyPr wrap="square" lIns="25400" rIns="25400" tIns="12700" bIns="12700">
+          <a:bodyPr wrap="square" lIns="25400" tIns="12700" rIns="25400" bIns="12700">
             <a:normAutofit/>
           </a:bodyPr>
           <a:lstStyle/>
